--- a/psychologicalReview/figures/overwalleFig.pptx
+++ b/psychologicalReview/figures/overwalleFig.pptx
@@ -4,6 +4,9 @@
   <p:sldMasterIdLst>
     <p:sldMasterId id="2147483684" r:id="rId1"/>
   </p:sldMasterIdLst>
+  <p:notesMasterIdLst>
+    <p:notesMasterId r:id="rId3"/>
+  </p:notesMasterIdLst>
   <p:sldIdLst>
     <p:sldId id="259" r:id="rId2"/>
   </p:sldIdLst>
@@ -112,6 +115,439 @@
 </p:presentation>
 </file>
 
+<file path=ppt/notesMasters/notesMaster1.xml><?xml version="1.0" encoding="utf-8"?>
+<p:notesMaster xmlns:a="http://schemas.openxmlformats.org/drawingml/2006/main" xmlns:r="http://schemas.openxmlformats.org/officeDocument/2006/relationships" xmlns:p="http://schemas.openxmlformats.org/presentationml/2006/main">
+  <p:cSld>
+    <p:bg>
+      <p:bgRef idx="1001">
+        <a:schemeClr val="bg1"/>
+      </p:bgRef>
+    </p:bg>
+    <p:spTree>
+      <p:nvGrpSpPr>
+        <p:cNvPr id="1" name=""/>
+        <p:cNvGrpSpPr/>
+        <p:nvPr/>
+      </p:nvGrpSpPr>
+      <p:grpSpPr>
+        <a:xfrm>
+          <a:off x="0" y="0"/>
+          <a:ext cx="0" cy="0"/>
+          <a:chOff x="0" y="0"/>
+          <a:chExt cx="0" cy="0"/>
+        </a:xfrm>
+      </p:grpSpPr>
+      <p:sp>
+        <p:nvSpPr>
+          <p:cNvPr id="2" name="Header Placeholder 1"/>
+          <p:cNvSpPr>
+            <a:spLocks noGrp="1"/>
+          </p:cNvSpPr>
+          <p:nvPr>
+            <p:ph type="hdr" sz="quarter"/>
+          </p:nvPr>
+        </p:nvSpPr>
+        <p:spPr>
+          <a:xfrm>
+            <a:off x="0" y="0"/>
+            <a:ext cx="2971800" cy="458788"/>
+          </a:xfrm>
+          <a:prstGeom prst="rect">
+            <a:avLst/>
+          </a:prstGeom>
+        </p:spPr>
+        <p:txBody>
+          <a:bodyPr vert="horz" lIns="91440" tIns="45720" rIns="91440" bIns="45720" rtlCol="0"/>
+          <a:lstStyle>
+            <a:lvl1pPr algn="l">
+              <a:defRPr sz="1200"/>
+            </a:lvl1pPr>
+          </a:lstStyle>
+          <a:p>
+            <a:endParaRPr lang="en-US"/>
+          </a:p>
+        </p:txBody>
+      </p:sp>
+      <p:sp>
+        <p:nvSpPr>
+          <p:cNvPr id="3" name="Date Placeholder 2"/>
+          <p:cNvSpPr>
+            <a:spLocks noGrp="1"/>
+          </p:cNvSpPr>
+          <p:nvPr>
+            <p:ph type="dt" idx="1"/>
+          </p:nvPr>
+        </p:nvSpPr>
+        <p:spPr>
+          <a:xfrm>
+            <a:off x="3884613" y="0"/>
+            <a:ext cx="2971800" cy="458788"/>
+          </a:xfrm>
+          <a:prstGeom prst="rect">
+            <a:avLst/>
+          </a:prstGeom>
+        </p:spPr>
+        <p:txBody>
+          <a:bodyPr vert="horz" lIns="91440" tIns="45720" rIns="91440" bIns="45720" rtlCol="0"/>
+          <a:lstStyle>
+            <a:lvl1pPr algn="r">
+              <a:defRPr sz="1200"/>
+            </a:lvl1pPr>
+          </a:lstStyle>
+          <a:p>
+            <a:fld id="{609DA389-F86B-4760-8BD2-5EB7BB5FB74A}" type="datetimeFigureOut">
+              <a:rPr lang="en-US" smtClean="0"/>
+              <a:t>6/19/2026</a:t>
+            </a:fld>
+            <a:endParaRPr lang="en-US"/>
+          </a:p>
+        </p:txBody>
+      </p:sp>
+      <p:sp>
+        <p:nvSpPr>
+          <p:cNvPr id="4" name="Slide Image Placeholder 3"/>
+          <p:cNvSpPr>
+            <a:spLocks noGrp="1" noRot="1" noChangeAspect="1"/>
+          </p:cNvSpPr>
+          <p:nvPr>
+            <p:ph type="sldImg" idx="2"/>
+          </p:nvPr>
+        </p:nvSpPr>
+        <p:spPr>
+          <a:xfrm>
+            <a:off x="1693863" y="1143000"/>
+            <a:ext cx="3470275" cy="3086100"/>
+          </a:xfrm>
+          <a:prstGeom prst="rect">
+            <a:avLst/>
+          </a:prstGeom>
+          <a:noFill/>
+          <a:ln w="12700">
+            <a:solidFill>
+              <a:prstClr val="black"/>
+            </a:solidFill>
+          </a:ln>
+        </p:spPr>
+        <p:txBody>
+          <a:bodyPr vert="horz" lIns="91440" tIns="45720" rIns="91440" bIns="45720" rtlCol="0" anchor="ctr"/>
+          <a:lstStyle/>
+          <a:p>
+            <a:endParaRPr lang="en-US"/>
+          </a:p>
+        </p:txBody>
+      </p:sp>
+      <p:sp>
+        <p:nvSpPr>
+          <p:cNvPr id="5" name="Notes Placeholder 4"/>
+          <p:cNvSpPr>
+            <a:spLocks noGrp="1"/>
+          </p:cNvSpPr>
+          <p:nvPr>
+            <p:ph type="body" sz="quarter" idx="3"/>
+          </p:nvPr>
+        </p:nvSpPr>
+        <p:spPr>
+          <a:xfrm>
+            <a:off x="685800" y="4400550"/>
+            <a:ext cx="5486400" cy="3600450"/>
+          </a:xfrm>
+          <a:prstGeom prst="rect">
+            <a:avLst/>
+          </a:prstGeom>
+        </p:spPr>
+        <p:txBody>
+          <a:bodyPr vert="horz" lIns="91440" tIns="45720" rIns="91440" bIns="45720" rtlCol="0"/>
+          <a:lstStyle/>
+          <a:p>
+            <a:pPr lvl="0"/>
+            <a:r>
+              <a:rPr lang="en-US"/>
+              <a:t>Click to edit Master text styles</a:t>
+            </a:r>
+          </a:p>
+          <a:p>
+            <a:pPr lvl="1"/>
+            <a:r>
+              <a:rPr lang="en-US"/>
+              <a:t>Second level</a:t>
+            </a:r>
+          </a:p>
+          <a:p>
+            <a:pPr lvl="2"/>
+            <a:r>
+              <a:rPr lang="en-US"/>
+              <a:t>Third level</a:t>
+            </a:r>
+          </a:p>
+          <a:p>
+            <a:pPr lvl="3"/>
+            <a:r>
+              <a:rPr lang="en-US"/>
+              <a:t>Fourth level</a:t>
+            </a:r>
+          </a:p>
+          <a:p>
+            <a:pPr lvl="4"/>
+            <a:r>
+              <a:rPr lang="en-US"/>
+              <a:t>Fifth level</a:t>
+            </a:r>
+          </a:p>
+        </p:txBody>
+      </p:sp>
+      <p:sp>
+        <p:nvSpPr>
+          <p:cNvPr id="6" name="Footer Placeholder 5"/>
+          <p:cNvSpPr>
+            <a:spLocks noGrp="1"/>
+          </p:cNvSpPr>
+          <p:nvPr>
+            <p:ph type="ftr" sz="quarter" idx="4"/>
+          </p:nvPr>
+        </p:nvSpPr>
+        <p:spPr>
+          <a:xfrm>
+            <a:off x="0" y="8685213"/>
+            <a:ext cx="2971800" cy="458787"/>
+          </a:xfrm>
+          <a:prstGeom prst="rect">
+            <a:avLst/>
+          </a:prstGeom>
+        </p:spPr>
+        <p:txBody>
+          <a:bodyPr vert="horz" lIns="91440" tIns="45720" rIns="91440" bIns="45720" rtlCol="0" anchor="b"/>
+          <a:lstStyle>
+            <a:lvl1pPr algn="l">
+              <a:defRPr sz="1200"/>
+            </a:lvl1pPr>
+          </a:lstStyle>
+          <a:p>
+            <a:endParaRPr lang="en-US"/>
+          </a:p>
+        </p:txBody>
+      </p:sp>
+      <p:sp>
+        <p:nvSpPr>
+          <p:cNvPr id="7" name="Slide Number Placeholder 6"/>
+          <p:cNvSpPr>
+            <a:spLocks noGrp="1"/>
+          </p:cNvSpPr>
+          <p:nvPr>
+            <p:ph type="sldNum" sz="quarter" idx="5"/>
+          </p:nvPr>
+        </p:nvSpPr>
+        <p:spPr>
+          <a:xfrm>
+            <a:off x="3884613" y="8685213"/>
+            <a:ext cx="2971800" cy="458787"/>
+          </a:xfrm>
+          <a:prstGeom prst="rect">
+            <a:avLst/>
+          </a:prstGeom>
+        </p:spPr>
+        <p:txBody>
+          <a:bodyPr vert="horz" lIns="91440" tIns="45720" rIns="91440" bIns="45720" rtlCol="0" anchor="b"/>
+          <a:lstStyle>
+            <a:lvl1pPr algn="r">
+              <a:defRPr sz="1200"/>
+            </a:lvl1pPr>
+          </a:lstStyle>
+          <a:p>
+            <a:fld id="{4F61A064-CB5C-4CAD-8D6A-846BDFCA898B}" type="slidenum">
+              <a:rPr lang="en-US" smtClean="0"/>
+              <a:t>‹#›</a:t>
+            </a:fld>
+            <a:endParaRPr lang="en-US"/>
+          </a:p>
+        </p:txBody>
+      </p:sp>
+    </p:spTree>
+    <p:extLst>
+      <p:ext uri="{BB962C8B-B14F-4D97-AF65-F5344CB8AC3E}">
+        <p14:creationId xmlns:p14="http://schemas.microsoft.com/office/powerpoint/2010/main" val="1335463042"/>
+      </p:ext>
+    </p:extLst>
+  </p:cSld>
+  <p:clrMap bg1="lt1" tx1="dk1" bg2="lt2" tx2="dk2" accent1="accent1" accent2="accent2" accent3="accent3" accent4="accent4" accent5="accent5" accent6="accent6" hlink="hlink" folHlink="folHlink"/>
+  <p:notesStyle>
+    <a:lvl1pPr marL="0" algn="l" defTabSz="914400" rtl="0" eaLnBrk="1" latinLnBrk="0" hangingPunct="1">
+      <a:defRPr sz="1200" kern="1200">
+        <a:solidFill>
+          <a:schemeClr val="tx1"/>
+        </a:solidFill>
+        <a:latin typeface="+mn-lt"/>
+        <a:ea typeface="+mn-ea"/>
+        <a:cs typeface="+mn-cs"/>
+      </a:defRPr>
+    </a:lvl1pPr>
+    <a:lvl2pPr marL="457200" algn="l" defTabSz="914400" rtl="0" eaLnBrk="1" latinLnBrk="0" hangingPunct="1">
+      <a:defRPr sz="1200" kern="1200">
+        <a:solidFill>
+          <a:schemeClr val="tx1"/>
+        </a:solidFill>
+        <a:latin typeface="+mn-lt"/>
+        <a:ea typeface="+mn-ea"/>
+        <a:cs typeface="+mn-cs"/>
+      </a:defRPr>
+    </a:lvl2pPr>
+    <a:lvl3pPr marL="914400" algn="l" defTabSz="914400" rtl="0" eaLnBrk="1" latinLnBrk="0" hangingPunct="1">
+      <a:defRPr sz="1200" kern="1200">
+        <a:solidFill>
+          <a:schemeClr val="tx1"/>
+        </a:solidFill>
+        <a:latin typeface="+mn-lt"/>
+        <a:ea typeface="+mn-ea"/>
+        <a:cs typeface="+mn-cs"/>
+      </a:defRPr>
+    </a:lvl3pPr>
+    <a:lvl4pPr marL="1371600" algn="l" defTabSz="914400" rtl="0" eaLnBrk="1" latinLnBrk="0" hangingPunct="1">
+      <a:defRPr sz="1200" kern="1200">
+        <a:solidFill>
+          <a:schemeClr val="tx1"/>
+        </a:solidFill>
+        <a:latin typeface="+mn-lt"/>
+        <a:ea typeface="+mn-ea"/>
+        <a:cs typeface="+mn-cs"/>
+      </a:defRPr>
+    </a:lvl4pPr>
+    <a:lvl5pPr marL="1828800" algn="l" defTabSz="914400" rtl="0" eaLnBrk="1" latinLnBrk="0" hangingPunct="1">
+      <a:defRPr sz="1200" kern="1200">
+        <a:solidFill>
+          <a:schemeClr val="tx1"/>
+        </a:solidFill>
+        <a:latin typeface="+mn-lt"/>
+        <a:ea typeface="+mn-ea"/>
+        <a:cs typeface="+mn-cs"/>
+      </a:defRPr>
+    </a:lvl5pPr>
+    <a:lvl6pPr marL="2286000" algn="l" defTabSz="914400" rtl="0" eaLnBrk="1" latinLnBrk="0" hangingPunct="1">
+      <a:defRPr sz="1200" kern="1200">
+        <a:solidFill>
+          <a:schemeClr val="tx1"/>
+        </a:solidFill>
+        <a:latin typeface="+mn-lt"/>
+        <a:ea typeface="+mn-ea"/>
+        <a:cs typeface="+mn-cs"/>
+      </a:defRPr>
+    </a:lvl6pPr>
+    <a:lvl7pPr marL="2743200" algn="l" defTabSz="914400" rtl="0" eaLnBrk="1" latinLnBrk="0" hangingPunct="1">
+      <a:defRPr sz="1200" kern="1200">
+        <a:solidFill>
+          <a:schemeClr val="tx1"/>
+        </a:solidFill>
+        <a:latin typeface="+mn-lt"/>
+        <a:ea typeface="+mn-ea"/>
+        <a:cs typeface="+mn-cs"/>
+      </a:defRPr>
+    </a:lvl7pPr>
+    <a:lvl8pPr marL="3200400" algn="l" defTabSz="914400" rtl="0" eaLnBrk="1" latinLnBrk="0" hangingPunct="1">
+      <a:defRPr sz="1200" kern="1200">
+        <a:solidFill>
+          <a:schemeClr val="tx1"/>
+        </a:solidFill>
+        <a:latin typeface="+mn-lt"/>
+        <a:ea typeface="+mn-ea"/>
+        <a:cs typeface="+mn-cs"/>
+      </a:defRPr>
+    </a:lvl8pPr>
+    <a:lvl9pPr marL="3657600" algn="l" defTabSz="914400" rtl="0" eaLnBrk="1" latinLnBrk="0" hangingPunct="1">
+      <a:defRPr sz="1200" kern="1200">
+        <a:solidFill>
+          <a:schemeClr val="tx1"/>
+        </a:solidFill>
+        <a:latin typeface="+mn-lt"/>
+        <a:ea typeface="+mn-ea"/>
+        <a:cs typeface="+mn-cs"/>
+      </a:defRPr>
+    </a:lvl9pPr>
+  </p:notesStyle>
+</p:notesMaster>
+</file>
+
+<file path=ppt/notesSlides/notesSlide1.xml><?xml version="1.0" encoding="utf-8"?>
+<p:notes xmlns:a="http://schemas.openxmlformats.org/drawingml/2006/main" xmlns:r="http://schemas.openxmlformats.org/officeDocument/2006/relationships" xmlns:p="http://schemas.openxmlformats.org/presentationml/2006/main">
+  <p:cSld>
+    <p:spTree>
+      <p:nvGrpSpPr>
+        <p:cNvPr id="1" name=""/>
+        <p:cNvGrpSpPr/>
+        <p:nvPr/>
+      </p:nvGrpSpPr>
+      <p:grpSpPr>
+        <a:xfrm>
+          <a:off x="0" y="0"/>
+          <a:ext cx="0" cy="0"/>
+          <a:chOff x="0" y="0"/>
+          <a:chExt cx="0" cy="0"/>
+        </a:xfrm>
+      </p:grpSpPr>
+      <p:sp>
+        <p:nvSpPr>
+          <p:cNvPr id="2" name="Slide Image Placeholder 1"/>
+          <p:cNvSpPr>
+            <a:spLocks noGrp="1" noRot="1" noChangeAspect="1"/>
+          </p:cNvSpPr>
+          <p:nvPr>
+            <p:ph type="sldImg"/>
+          </p:nvPr>
+        </p:nvSpPr>
+        <p:spPr/>
+      </p:sp>
+      <p:sp>
+        <p:nvSpPr>
+          <p:cNvPr id="3" name="Notes Placeholder 2"/>
+          <p:cNvSpPr>
+            <a:spLocks noGrp="1"/>
+          </p:cNvSpPr>
+          <p:nvPr>
+            <p:ph type="body" idx="1"/>
+          </p:nvPr>
+        </p:nvSpPr>
+        <p:spPr/>
+        <p:txBody>
+          <a:bodyPr/>
+          <a:lstStyle/>
+          <a:p>
+            <a:endParaRPr lang="en-US" dirty="0"/>
+          </a:p>
+        </p:txBody>
+      </p:sp>
+      <p:sp>
+        <p:nvSpPr>
+          <p:cNvPr id="4" name="Slide Number Placeholder 3"/>
+          <p:cNvSpPr>
+            <a:spLocks noGrp="1"/>
+          </p:cNvSpPr>
+          <p:nvPr>
+            <p:ph type="sldNum" sz="quarter" idx="5"/>
+          </p:nvPr>
+        </p:nvSpPr>
+        <p:spPr/>
+        <p:txBody>
+          <a:bodyPr/>
+          <a:lstStyle/>
+          <a:p>
+            <a:fld id="{4F61A064-CB5C-4CAD-8D6A-846BDFCA898B}" type="slidenum">
+              <a:rPr lang="en-US" smtClean="0"/>
+              <a:t>1</a:t>
+            </a:fld>
+            <a:endParaRPr lang="en-US"/>
+          </a:p>
+        </p:txBody>
+      </p:sp>
+    </p:spTree>
+    <p:extLst>
+      <p:ext uri="{BB962C8B-B14F-4D97-AF65-F5344CB8AC3E}">
+        <p14:creationId xmlns:p14="http://schemas.microsoft.com/office/powerpoint/2010/main" val="2323010290"/>
+      </p:ext>
+    </p:extLst>
+  </p:cSld>
+  <p:clrMapOvr>
+    <a:masterClrMapping/>
+  </p:clrMapOvr>
+</p:notes>
+</file>
+
 <file path=ppt/slideLayouts/slideLayout1.xml><?xml version="1.0" encoding="utf-8"?>
 <p:sldLayout xmlns:a="http://schemas.openxmlformats.org/drawingml/2006/main" xmlns:r="http://schemas.openxmlformats.org/officeDocument/2006/relationships" xmlns:p="http://schemas.openxmlformats.org/presentationml/2006/main" type="title" preserve="1">
   <p:cSld name="Title Slide">
@@ -141,7 +577,7 @@
         </p:nvSpPr>
         <p:spPr>
           <a:xfrm>
-            <a:off x="972026" y="1885414"/>
+            <a:off x="972028" y="1885418"/>
             <a:ext cx="11016298" cy="4010837"/>
           </a:xfrm>
         </p:spPr>
@@ -173,7 +609,7 @@
         </p:nvSpPr>
         <p:spPr>
           <a:xfrm>
-            <a:off x="1620044" y="6050924"/>
+            <a:off x="1620046" y="6050924"/>
             <a:ext cx="9720263" cy="2781450"/>
           </a:xfrm>
         </p:spPr>
@@ -243,7 +679,7 @@
           <a:p>
             <a:fld id="{67C0AFF0-F3EA-4DCF-802E-2F5116650474}" type="datetimeFigureOut">
               <a:rPr lang="en-US" smtClean="0"/>
-              <a:t>3/23/2026</a:t>
+              <a:t>6/19/2026</a:t>
             </a:fld>
             <a:endParaRPr lang="en-US"/>
           </a:p>
@@ -413,7 +849,7 @@
           <a:p>
             <a:fld id="{67C0AFF0-F3EA-4DCF-802E-2F5116650474}" type="datetimeFigureOut">
               <a:rPr lang="en-US" smtClean="0"/>
-              <a:t>3/23/2026</a:t>
+              <a:t>6/19/2026</a:t>
             </a:fld>
             <a:endParaRPr lang="en-US"/>
           </a:p>
@@ -503,7 +939,7 @@
         </p:nvSpPr>
         <p:spPr>
           <a:xfrm>
-            <a:off x="9274751" y="613359"/>
+            <a:off x="9274753" y="613363"/>
             <a:ext cx="2794575" cy="9763081"/>
           </a:xfrm>
         </p:spPr>
@@ -531,7 +967,7 @@
         </p:nvSpPr>
         <p:spPr>
           <a:xfrm>
-            <a:off x="891025" y="613359"/>
+            <a:off x="891025" y="613363"/>
             <a:ext cx="8221722" cy="9763081"/>
           </a:xfrm>
         </p:spPr>
@@ -593,7 +1029,7 @@
           <a:p>
             <a:fld id="{67C0AFF0-F3EA-4DCF-802E-2F5116650474}" type="datetimeFigureOut">
               <a:rPr lang="en-US" smtClean="0"/>
-              <a:t>3/23/2026</a:t>
+              <a:t>6/19/2026</a:t>
             </a:fld>
             <a:endParaRPr lang="en-US"/>
           </a:p>
@@ -763,7 +1199,7 @@
           <a:p>
             <a:fld id="{67C0AFF0-F3EA-4DCF-802E-2F5116650474}" type="datetimeFigureOut">
               <a:rPr lang="en-US" smtClean="0"/>
-              <a:t>3/23/2026</a:t>
+              <a:t>6/19/2026</a:t>
             </a:fld>
             <a:endParaRPr lang="en-US"/>
           </a:p>
@@ -1009,7 +1445,7 @@
           <a:p>
             <a:fld id="{67C0AFF0-F3EA-4DCF-802E-2F5116650474}" type="datetimeFigureOut">
               <a:rPr lang="en-US" smtClean="0"/>
-              <a:t>3/23/2026</a:t>
+              <a:t>6/19/2026</a:t>
             </a:fld>
             <a:endParaRPr lang="en-US"/>
           </a:p>
@@ -1122,7 +1558,7 @@
         </p:nvSpPr>
         <p:spPr>
           <a:xfrm>
-            <a:off x="891024" y="3066796"/>
+            <a:off x="891026" y="3066796"/>
             <a:ext cx="5508149" cy="7309644"/>
           </a:xfrm>
         </p:spPr>
@@ -1179,7 +1615,7 @@
         </p:nvSpPr>
         <p:spPr>
           <a:xfrm>
-            <a:off x="6561177" y="3066796"/>
+            <a:off x="6561179" y="3066796"/>
             <a:ext cx="5508149" cy="7309644"/>
           </a:xfrm>
         </p:spPr>
@@ -1241,7 +1677,7 @@
           <a:p>
             <a:fld id="{67C0AFF0-F3EA-4DCF-802E-2F5116650474}" type="datetimeFigureOut">
               <a:rPr lang="en-US" smtClean="0"/>
-              <a:t>3/23/2026</a:t>
+              <a:t>6/19/2026</a:t>
             </a:fld>
             <a:endParaRPr lang="en-US"/>
           </a:p>
@@ -1359,7 +1795,7 @@
         </p:nvSpPr>
         <p:spPr>
           <a:xfrm>
-            <a:off x="892713" y="2824120"/>
+            <a:off x="892714" y="2824120"/>
             <a:ext cx="5482835" cy="1384058"/>
           </a:xfrm>
         </p:spPr>
@@ -1424,7 +1860,7 @@
         </p:nvSpPr>
         <p:spPr>
           <a:xfrm>
-            <a:off x="892713" y="4208178"/>
+            <a:off x="892714" y="4208178"/>
             <a:ext cx="5482835" cy="6189596"/>
           </a:xfrm>
         </p:spPr>
@@ -1481,7 +1917,7 @@
         </p:nvSpPr>
         <p:spPr>
           <a:xfrm>
-            <a:off x="6561178" y="2824120"/>
+            <a:off x="6561180" y="2824120"/>
             <a:ext cx="5509837" cy="1384058"/>
           </a:xfrm>
         </p:spPr>
@@ -1546,7 +1982,7 @@
         </p:nvSpPr>
         <p:spPr>
           <a:xfrm>
-            <a:off x="6561178" y="4208178"/>
+            <a:off x="6561180" y="4208178"/>
             <a:ext cx="5509837" cy="6189596"/>
           </a:xfrm>
         </p:spPr>
@@ -1608,7 +2044,7 @@
           <a:p>
             <a:fld id="{67C0AFF0-F3EA-4DCF-802E-2F5116650474}" type="datetimeFigureOut">
               <a:rPr lang="en-US" smtClean="0"/>
-              <a:t>3/23/2026</a:t>
+              <a:t>6/19/2026</a:t>
             </a:fld>
             <a:endParaRPr lang="en-US"/>
           </a:p>
@@ -1726,7 +2162,7 @@
           <a:p>
             <a:fld id="{67C0AFF0-F3EA-4DCF-802E-2F5116650474}" type="datetimeFigureOut">
               <a:rPr lang="en-US" smtClean="0"/>
-              <a:t>3/23/2026</a:t>
+              <a:t>6/19/2026</a:t>
             </a:fld>
             <a:endParaRPr lang="en-US"/>
           </a:p>
@@ -1821,7 +2257,7 @@
           <a:p>
             <a:fld id="{67C0AFF0-F3EA-4DCF-802E-2F5116650474}" type="datetimeFigureOut">
               <a:rPr lang="en-US" smtClean="0"/>
-              <a:t>3/23/2026</a:t>
+              <a:t>6/19/2026</a:t>
             </a:fld>
             <a:endParaRPr lang="en-US"/>
           </a:p>
@@ -1943,7 +2379,7 @@
         </p:nvSpPr>
         <p:spPr>
           <a:xfrm>
-            <a:off x="5509837" y="1658740"/>
+            <a:off x="5509839" y="1658744"/>
             <a:ext cx="6561177" cy="8187013"/>
           </a:xfrm>
         </p:spPr>
@@ -2028,7 +2464,7 @@
         </p:nvSpPr>
         <p:spPr>
           <a:xfrm>
-            <a:off x="892712" y="3456146"/>
+            <a:off x="892712" y="3456147"/>
             <a:ext cx="4180050" cy="6402939"/>
           </a:xfrm>
         </p:spPr>
@@ -2098,7 +2534,7 @@
           <a:p>
             <a:fld id="{67C0AFF0-F3EA-4DCF-802E-2F5116650474}" type="datetimeFigureOut">
               <a:rPr lang="en-US" smtClean="0"/>
-              <a:t>3/23/2026</a:t>
+              <a:t>6/19/2026</a:t>
             </a:fld>
             <a:endParaRPr lang="en-US"/>
           </a:p>
@@ -2220,7 +2656,7 @@
         </p:nvSpPr>
         <p:spPr>
           <a:xfrm>
-            <a:off x="5509837" y="1658740"/>
+            <a:off x="5509839" y="1658744"/>
             <a:ext cx="6561177" cy="8187013"/>
           </a:xfrm>
         </p:spPr>
@@ -2285,7 +2721,7 @@
         </p:nvSpPr>
         <p:spPr>
           <a:xfrm>
-            <a:off x="892712" y="3456146"/>
+            <a:off x="892712" y="3456147"/>
             <a:ext cx="4180050" cy="6402939"/>
           </a:xfrm>
         </p:spPr>
@@ -2355,7 +2791,7 @@
           <a:p>
             <a:fld id="{67C0AFF0-F3EA-4DCF-802E-2F5116650474}" type="datetimeFigureOut">
               <a:rPr lang="en-US" smtClean="0"/>
-              <a:t>3/23/2026</a:t>
+              <a:t>6/19/2026</a:t>
             </a:fld>
             <a:endParaRPr lang="en-US"/>
           </a:p>
@@ -2545,7 +2981,7 @@
         </p:nvSpPr>
         <p:spPr>
           <a:xfrm>
-            <a:off x="891024" y="10677788"/>
+            <a:off x="891026" y="10677792"/>
             <a:ext cx="2916079" cy="613359"/>
           </a:xfrm>
           <a:prstGeom prst="rect">
@@ -2568,7 +3004,7 @@
           <a:p>
             <a:fld id="{67C0AFF0-F3EA-4DCF-802E-2F5116650474}" type="datetimeFigureOut">
               <a:rPr lang="en-US" smtClean="0"/>
-              <a:t>3/23/2026</a:t>
+              <a:t>6/19/2026</a:t>
             </a:fld>
             <a:endParaRPr lang="en-US"/>
           </a:p>
@@ -2586,7 +3022,7 @@
         </p:nvSpPr>
         <p:spPr>
           <a:xfrm>
-            <a:off x="4293116" y="10677788"/>
+            <a:off x="4293116" y="10677792"/>
             <a:ext cx="4374118" cy="613359"/>
           </a:xfrm>
           <a:prstGeom prst="rect">
@@ -2623,7 +3059,7 @@
         </p:nvSpPr>
         <p:spPr>
           <a:xfrm>
-            <a:off x="9153247" y="10677788"/>
+            <a:off x="9153249" y="10677792"/>
             <a:ext cx="2916079" cy="613359"/>
           </a:xfrm>
           <a:prstGeom prst="rect">
@@ -2988,13 +3424,13 @@
           <p:nvPr>
             <p:extLst>
               <p:ext uri="{D42A27DB-BD31-4B8C-83A1-F6EECF244321}">
-                <p14:modId xmlns:p14="http://schemas.microsoft.com/office/powerpoint/2010/main" val="4140511946"/>
+                <p14:modId xmlns:p14="http://schemas.microsoft.com/office/powerpoint/2010/main" val="2664632920"/>
               </p:ext>
             </p:extLst>
           </p:nvPr>
         </p:nvGraphicFramePr>
         <p:xfrm>
-          <a:off x="935362" y="373213"/>
+          <a:off x="1286245" y="43599"/>
           <a:ext cx="1286765" cy="2400935"/>
         </p:xfrm>
         <a:graphic>
@@ -4284,13 +4720,13 @@
           <p:nvPr>
             <p:extLst>
               <p:ext uri="{D42A27DB-BD31-4B8C-83A1-F6EECF244321}">
-                <p14:modId xmlns:p14="http://schemas.microsoft.com/office/powerpoint/2010/main" val="1041373745"/>
+                <p14:modId xmlns:p14="http://schemas.microsoft.com/office/powerpoint/2010/main" val="2135450525"/>
               </p:ext>
             </p:extLst>
           </p:nvPr>
         </p:nvGraphicFramePr>
         <p:xfrm>
-          <a:off x="319659" y="1851493"/>
+          <a:off x="670538" y="1521879"/>
           <a:ext cx="228918" cy="480187"/>
         </p:xfrm>
         <a:graphic>
@@ -4384,13 +4820,13 @@
           <p:nvPr>
             <p:extLst>
               <p:ext uri="{D42A27DB-BD31-4B8C-83A1-F6EECF244321}">
-                <p14:modId xmlns:p14="http://schemas.microsoft.com/office/powerpoint/2010/main" val="1248316399"/>
+                <p14:modId xmlns:p14="http://schemas.microsoft.com/office/powerpoint/2010/main" val="4262349334"/>
               </p:ext>
             </p:extLst>
           </p:nvPr>
         </p:nvGraphicFramePr>
         <p:xfrm>
-          <a:off x="2544890" y="1851493"/>
+          <a:off x="2895769" y="1521879"/>
           <a:ext cx="228918" cy="480187"/>
         </p:xfrm>
         <a:graphic>
@@ -4480,7 +4916,7 @@
         </p:nvSpPr>
         <p:spPr>
           <a:xfrm rot="16424262">
-            <a:off x="2209329" y="1169315"/>
+            <a:off x="2560208" y="839701"/>
             <a:ext cx="437712" cy="366087"/>
           </a:xfrm>
           <a:prstGeom prst="arc">
@@ -4534,8 +4970,8 @@
         </p:nvSpPr>
         <p:spPr>
           <a:xfrm>
-            <a:off x="1389433" y="2801220"/>
-            <a:ext cx="452368" cy="430887"/>
+            <a:off x="1612718" y="2482239"/>
+            <a:ext cx="548548" cy="553998"/>
           </a:xfrm>
           <a:prstGeom prst="rect">
             <a:avLst/>
@@ -4556,7 +4992,7 @@
           <a:lstStyle/>
           <a:p>
             <a:r>
-              <a:rPr lang="en-US" sz="2200" dirty="0">
+              <a:rPr lang="en-US" sz="3000" dirty="0">
                 <a:solidFill>
                   <a:schemeClr val="bg1"/>
                 </a:solidFill>
@@ -4566,7 +5002,7 @@
               <a:t>T</a:t>
             </a:r>
             <a:r>
-              <a:rPr lang="en-US" sz="2200" baseline="-25000" dirty="0">
+              <a:rPr lang="en-US" sz="3000" baseline="-25000" dirty="0">
                 <a:solidFill>
                   <a:schemeClr val="bg1"/>
                 </a:solidFill>
@@ -4592,7 +5028,7 @@
         </p:nvCxnSpPr>
         <p:spPr>
           <a:xfrm flipV="1">
-            <a:off x="607605" y="1501768"/>
+            <a:off x="958488" y="1172150"/>
             <a:ext cx="268735" cy="474148"/>
           </a:xfrm>
           <a:prstGeom prst="straightConnector1">
@@ -4637,7 +5073,7 @@
         </p:nvCxnSpPr>
         <p:spPr>
           <a:xfrm flipV="1">
-            <a:off x="612439" y="1815403"/>
+            <a:off x="963322" y="1485789"/>
             <a:ext cx="234849" cy="261137"/>
           </a:xfrm>
           <a:prstGeom prst="straightConnector1">
@@ -4682,7 +5118,7 @@
         </p:nvCxnSpPr>
         <p:spPr>
           <a:xfrm>
-            <a:off x="628981" y="2108617"/>
+            <a:off x="979864" y="1778999"/>
             <a:ext cx="201763" cy="0"/>
           </a:xfrm>
           <a:prstGeom prst="straightConnector1">
@@ -4727,7 +5163,7 @@
         </p:nvCxnSpPr>
         <p:spPr>
           <a:xfrm>
-            <a:off x="624547" y="2171970"/>
+            <a:off x="975430" y="1842356"/>
             <a:ext cx="246805" cy="206167"/>
           </a:xfrm>
           <a:prstGeom prst="straightConnector1">
@@ -4772,7 +5208,7 @@
         </p:nvCxnSpPr>
         <p:spPr>
           <a:xfrm>
-            <a:off x="2255452" y="1598153"/>
+            <a:off x="2606335" y="1268539"/>
             <a:ext cx="249633" cy="413865"/>
           </a:xfrm>
           <a:prstGeom prst="straightConnector1">
@@ -4817,7 +5253,7 @@
         </p:nvCxnSpPr>
         <p:spPr>
           <a:xfrm>
-            <a:off x="2268699" y="1850783"/>
+            <a:off x="2619582" y="1521165"/>
             <a:ext cx="182913" cy="220080"/>
           </a:xfrm>
           <a:prstGeom prst="straightConnector1">
@@ -4862,7 +5298,7 @@
         </p:nvCxnSpPr>
         <p:spPr>
           <a:xfrm>
-            <a:off x="2261270" y="2128669"/>
+            <a:off x="2612153" y="1799051"/>
             <a:ext cx="201763" cy="0"/>
           </a:xfrm>
           <a:prstGeom prst="straightConnector1">
@@ -4907,7 +5343,7 @@
         </p:nvCxnSpPr>
         <p:spPr>
           <a:xfrm flipH="1">
-            <a:off x="2286002" y="2199837"/>
+            <a:off x="2636885" y="1870223"/>
             <a:ext cx="166253" cy="219741"/>
           </a:xfrm>
           <a:prstGeom prst="straightConnector1">
@@ -4950,8 +5386,8 @@
         </p:nvSpPr>
         <p:spPr>
           <a:xfrm>
-            <a:off x="75492" y="2266488"/>
-            <a:ext cx="803425" cy="396712"/>
+            <a:off x="139290" y="1936870"/>
+            <a:ext cx="1167307" cy="553998"/>
           </a:xfrm>
           <a:prstGeom prst="rect">
             <a:avLst/>
@@ -4965,7 +5401,7 @@
           <a:lstStyle/>
           <a:p>
             <a:r>
-              <a:rPr lang="en-US" dirty="0">
+              <a:rPr lang="en-US" sz="3000" b="1" dirty="0">
                 <a:latin typeface="Times New Roman" panose="02020603050405020304" pitchFamily="18" charset="0"/>
                 <a:cs typeface="Times New Roman" panose="02020603050405020304" pitchFamily="18" charset="0"/>
               </a:rPr>
@@ -4988,8 +5424,8 @@
         </p:nvSpPr>
         <p:spPr>
           <a:xfrm>
-            <a:off x="2347522" y="2281342"/>
-            <a:ext cx="1255472" cy="369332"/>
+            <a:off x="2666502" y="1930458"/>
+            <a:ext cx="976549" cy="553998"/>
           </a:xfrm>
           <a:prstGeom prst="rect">
             <a:avLst/>
@@ -5003,11 +5439,11 @@
           <a:lstStyle/>
           <a:p>
             <a:r>
-              <a:rPr lang="en-US" dirty="0">
+              <a:rPr lang="en-US" sz="3000" b="1" dirty="0">
                 <a:latin typeface="Times New Roman" panose="02020603050405020304" pitchFamily="18" charset="0"/>
                 <a:cs typeface="Times New Roman" panose="02020603050405020304" pitchFamily="18" charset="0"/>
               </a:rPr>
-              <a:t>Goal object</a:t>
+              <a:t>Goal</a:t>
             </a:r>
           </a:p>
         </p:txBody>
@@ -5027,13 +5463,13 @@
           <p:nvPr>
             <p:extLst>
               <p:ext uri="{D42A27DB-BD31-4B8C-83A1-F6EECF244321}">
-                <p14:modId xmlns:p14="http://schemas.microsoft.com/office/powerpoint/2010/main" val="183909411"/>
+                <p14:modId xmlns:p14="http://schemas.microsoft.com/office/powerpoint/2010/main" val="139042750"/>
               </p:ext>
             </p:extLst>
           </p:nvPr>
         </p:nvGraphicFramePr>
         <p:xfrm>
-          <a:off x="5487484" y="373213"/>
+          <a:off x="5487488" y="43599"/>
           <a:ext cx="1286765" cy="2400935"/>
         </p:xfrm>
         <a:graphic>
@@ -6326,13 +6762,13 @@
           <p:nvPr>
             <p:extLst>
               <p:ext uri="{D42A27DB-BD31-4B8C-83A1-F6EECF244321}">
-                <p14:modId xmlns:p14="http://schemas.microsoft.com/office/powerpoint/2010/main" val="1253111518"/>
+                <p14:modId xmlns:p14="http://schemas.microsoft.com/office/powerpoint/2010/main" val="1167977626"/>
               </p:ext>
             </p:extLst>
           </p:nvPr>
         </p:nvGraphicFramePr>
         <p:xfrm>
-          <a:off x="4871781" y="1851493"/>
+          <a:off x="4871781" y="1521879"/>
           <a:ext cx="228918" cy="480187"/>
         </p:xfrm>
         <a:graphic>
@@ -6426,13 +6862,13 @@
           <p:nvPr>
             <p:extLst>
               <p:ext uri="{D42A27DB-BD31-4B8C-83A1-F6EECF244321}">
-                <p14:modId xmlns:p14="http://schemas.microsoft.com/office/powerpoint/2010/main" val="1164833322"/>
+                <p14:modId xmlns:p14="http://schemas.microsoft.com/office/powerpoint/2010/main" val="3471713542"/>
               </p:ext>
             </p:extLst>
           </p:nvPr>
         </p:nvGraphicFramePr>
         <p:xfrm>
-          <a:off x="7097012" y="1851493"/>
+          <a:off x="7097012" y="1521879"/>
           <a:ext cx="228918" cy="480187"/>
         </p:xfrm>
         <a:graphic>
@@ -6522,7 +6958,7 @@
         </p:nvSpPr>
         <p:spPr>
           <a:xfrm rot="16424262">
-            <a:off x="6761451" y="1169315"/>
+            <a:off x="6761451" y="839701"/>
             <a:ext cx="437712" cy="366087"/>
           </a:xfrm>
           <a:prstGeom prst="arc">
@@ -6576,8 +7012,8 @@
         </p:nvSpPr>
         <p:spPr>
           <a:xfrm>
-            <a:off x="5941555" y="2801220"/>
-            <a:ext cx="452368" cy="430887"/>
+            <a:off x="5813961" y="2482239"/>
+            <a:ext cx="548548" cy="553998"/>
           </a:xfrm>
           <a:prstGeom prst="rect">
             <a:avLst/>
@@ -6598,7 +7034,7 @@
           <a:lstStyle/>
           <a:p>
             <a:r>
-              <a:rPr lang="en-US" sz="2200" dirty="0">
+              <a:rPr lang="en-US" sz="3000" dirty="0">
                 <a:solidFill>
                   <a:schemeClr val="bg1"/>
                 </a:solidFill>
@@ -6608,7 +7044,7 @@
               <a:t>T</a:t>
             </a:r>
             <a:r>
-              <a:rPr lang="en-US" sz="2200" baseline="-25000" dirty="0">
+              <a:rPr lang="en-US" sz="3000" baseline="-25000" dirty="0">
                 <a:solidFill>
                   <a:schemeClr val="bg1"/>
                 </a:solidFill>
@@ -6634,7 +7070,7 @@
         </p:nvCxnSpPr>
         <p:spPr>
           <a:xfrm flipV="1">
-            <a:off x="5159727" y="1501768"/>
+            <a:off x="5159731" y="1172150"/>
             <a:ext cx="268735" cy="474148"/>
           </a:xfrm>
           <a:prstGeom prst="straightConnector1">
@@ -6679,7 +7115,7 @@
         </p:nvCxnSpPr>
         <p:spPr>
           <a:xfrm flipV="1">
-            <a:off x="5164561" y="1815403"/>
+            <a:off x="5164565" y="1485789"/>
             <a:ext cx="234849" cy="261137"/>
           </a:xfrm>
           <a:prstGeom prst="straightConnector1">
@@ -6724,7 +7160,7 @@
         </p:nvCxnSpPr>
         <p:spPr>
           <a:xfrm>
-            <a:off x="5181103" y="2108617"/>
+            <a:off x="5181107" y="1778999"/>
             <a:ext cx="201763" cy="0"/>
           </a:xfrm>
           <a:prstGeom prst="straightConnector1">
@@ -6769,7 +7205,7 @@
         </p:nvCxnSpPr>
         <p:spPr>
           <a:xfrm>
-            <a:off x="5176669" y="2171970"/>
+            <a:off x="5176673" y="1842356"/>
             <a:ext cx="246805" cy="206167"/>
           </a:xfrm>
           <a:prstGeom prst="straightConnector1">
@@ -6814,7 +7250,7 @@
         </p:nvCxnSpPr>
         <p:spPr>
           <a:xfrm>
-            <a:off x="6807574" y="1598153"/>
+            <a:off x="6807578" y="1268539"/>
             <a:ext cx="249633" cy="413865"/>
           </a:xfrm>
           <a:prstGeom prst="straightConnector1">
@@ -6859,7 +7295,7 @@
         </p:nvCxnSpPr>
         <p:spPr>
           <a:xfrm>
-            <a:off x="6820821" y="1850783"/>
+            <a:off x="6820825" y="1521165"/>
             <a:ext cx="182913" cy="220080"/>
           </a:xfrm>
           <a:prstGeom prst="straightConnector1">
@@ -6904,7 +7340,7 @@
         </p:nvCxnSpPr>
         <p:spPr>
           <a:xfrm>
-            <a:off x="6813392" y="2128669"/>
+            <a:off x="6813396" y="1799051"/>
             <a:ext cx="201763" cy="0"/>
           </a:xfrm>
           <a:prstGeom prst="straightConnector1">
@@ -6949,7 +7385,7 @@
         </p:nvCxnSpPr>
         <p:spPr>
           <a:xfrm flipH="1">
-            <a:off x="6838124" y="2199837"/>
+            <a:off x="6838128" y="1870223"/>
             <a:ext cx="166253" cy="219741"/>
           </a:xfrm>
           <a:prstGeom prst="straightConnector1">
@@ -6992,8 +7428,8 @@
         </p:nvSpPr>
         <p:spPr>
           <a:xfrm>
-            <a:off x="4627614" y="2266488"/>
-            <a:ext cx="803425" cy="396712"/>
+            <a:off x="4298004" y="1936870"/>
+            <a:ext cx="1167307" cy="553998"/>
           </a:xfrm>
           <a:prstGeom prst="rect">
             <a:avLst/>
@@ -7007,7 +7443,7 @@
           <a:lstStyle/>
           <a:p>
             <a:r>
-              <a:rPr lang="en-US" dirty="0">
+              <a:rPr lang="en-US" sz="3000" b="1" dirty="0">
                 <a:latin typeface="Times New Roman" panose="02020603050405020304" pitchFamily="18" charset="0"/>
                 <a:cs typeface="Times New Roman" panose="02020603050405020304" pitchFamily="18" charset="0"/>
               </a:rPr>
@@ -7030,8 +7466,8 @@
         </p:nvSpPr>
         <p:spPr>
           <a:xfrm>
-            <a:off x="6899644" y="2281342"/>
-            <a:ext cx="1255472" cy="369332"/>
+            <a:off x="6899644" y="1962357"/>
+            <a:ext cx="976549" cy="553998"/>
           </a:xfrm>
           <a:prstGeom prst="rect">
             <a:avLst/>
@@ -7045,11 +7481,11 @@
           <a:lstStyle/>
           <a:p>
             <a:r>
-              <a:rPr lang="en-US" dirty="0">
+              <a:rPr lang="en-US" sz="3000" b="1" dirty="0">
                 <a:latin typeface="Times New Roman" panose="02020603050405020304" pitchFamily="18" charset="0"/>
                 <a:cs typeface="Times New Roman" panose="02020603050405020304" pitchFamily="18" charset="0"/>
               </a:rPr>
-              <a:t>Goal object</a:t>
+              <a:t>Goal</a:t>
             </a:r>
           </a:p>
         </p:txBody>
@@ -7069,13 +7505,13 @@
           <p:nvPr>
             <p:extLst>
               <p:ext uri="{D42A27DB-BD31-4B8C-83A1-F6EECF244321}">
-                <p14:modId xmlns:p14="http://schemas.microsoft.com/office/powerpoint/2010/main" val="1566469438"/>
+                <p14:modId xmlns:p14="http://schemas.microsoft.com/office/powerpoint/2010/main" val="3582993931"/>
               </p:ext>
             </p:extLst>
           </p:nvPr>
         </p:nvGraphicFramePr>
         <p:xfrm>
-          <a:off x="10105919" y="320237"/>
+          <a:off x="10105923" y="-9377"/>
           <a:ext cx="1286765" cy="2400935"/>
         </p:xfrm>
         <a:graphic>
@@ -8377,13 +8813,13 @@
           <p:nvPr>
             <p:extLst>
               <p:ext uri="{D42A27DB-BD31-4B8C-83A1-F6EECF244321}">
-                <p14:modId xmlns:p14="http://schemas.microsoft.com/office/powerpoint/2010/main" val="2168549599"/>
+                <p14:modId xmlns:p14="http://schemas.microsoft.com/office/powerpoint/2010/main" val="2827198611"/>
               </p:ext>
             </p:extLst>
           </p:nvPr>
         </p:nvGraphicFramePr>
         <p:xfrm>
-          <a:off x="9490216" y="1798517"/>
+          <a:off x="9490216" y="1468903"/>
           <a:ext cx="228918" cy="480187"/>
         </p:xfrm>
         <a:graphic>
@@ -8474,13 +8910,13 @@
           <p:nvPr>
             <p:extLst>
               <p:ext uri="{D42A27DB-BD31-4B8C-83A1-F6EECF244321}">
-                <p14:modId xmlns:p14="http://schemas.microsoft.com/office/powerpoint/2010/main" val="4244856403"/>
+                <p14:modId xmlns:p14="http://schemas.microsoft.com/office/powerpoint/2010/main" val="2032690744"/>
               </p:ext>
             </p:extLst>
           </p:nvPr>
         </p:nvGraphicFramePr>
         <p:xfrm>
-          <a:off x="11715447" y="1798517"/>
+          <a:off x="11715447" y="1468903"/>
           <a:ext cx="228918" cy="480187"/>
         </p:xfrm>
         <a:graphic>
@@ -8570,7 +9006,7 @@
         </p:nvSpPr>
         <p:spPr>
           <a:xfrm rot="16424262">
-            <a:off x="11379886" y="1116339"/>
+            <a:off x="11379886" y="786725"/>
             <a:ext cx="437712" cy="366087"/>
           </a:xfrm>
           <a:prstGeom prst="arc">
@@ -8624,8 +9060,8 @@
         </p:nvSpPr>
         <p:spPr>
           <a:xfrm>
-            <a:off x="10559990" y="2748244"/>
-            <a:ext cx="452368" cy="430887"/>
+            <a:off x="10432396" y="2429263"/>
+            <a:ext cx="548548" cy="553998"/>
           </a:xfrm>
           <a:prstGeom prst="rect">
             <a:avLst/>
@@ -8646,7 +9082,7 @@
           <a:lstStyle/>
           <a:p>
             <a:r>
-              <a:rPr lang="en-US" sz="2200" dirty="0">
+              <a:rPr lang="en-US" sz="3000" dirty="0">
                 <a:solidFill>
                   <a:schemeClr val="bg1"/>
                 </a:solidFill>
@@ -8656,7 +9092,7 @@
               <a:t>T</a:t>
             </a:r>
             <a:r>
-              <a:rPr lang="en-US" sz="2200" baseline="-25000" dirty="0">
+              <a:rPr lang="en-US" sz="3000" baseline="-25000" dirty="0">
                 <a:solidFill>
                   <a:schemeClr val="bg1"/>
                 </a:solidFill>
@@ -8682,7 +9118,7 @@
         </p:nvCxnSpPr>
         <p:spPr>
           <a:xfrm flipV="1">
-            <a:off x="9778162" y="1448792"/>
+            <a:off x="9778166" y="1119174"/>
             <a:ext cx="268735" cy="474148"/>
           </a:xfrm>
           <a:prstGeom prst="straightConnector1">
@@ -8727,7 +9163,7 @@
         </p:nvCxnSpPr>
         <p:spPr>
           <a:xfrm flipV="1">
-            <a:off x="9782996" y="1762427"/>
+            <a:off x="9783000" y="1432813"/>
             <a:ext cx="234849" cy="261137"/>
           </a:xfrm>
           <a:prstGeom prst="straightConnector1">
@@ -8772,7 +9208,7 @@
         </p:nvCxnSpPr>
         <p:spPr>
           <a:xfrm>
-            <a:off x="9799538" y="2055641"/>
+            <a:off x="9799542" y="1726023"/>
             <a:ext cx="201763" cy="0"/>
           </a:xfrm>
           <a:prstGeom prst="straightConnector1">
@@ -8817,7 +9253,7 @@
         </p:nvCxnSpPr>
         <p:spPr>
           <a:xfrm>
-            <a:off x="9795104" y="2118994"/>
+            <a:off x="9795108" y="1789380"/>
             <a:ext cx="246805" cy="206167"/>
           </a:xfrm>
           <a:prstGeom prst="straightConnector1">
@@ -8862,7 +9298,7 @@
         </p:nvCxnSpPr>
         <p:spPr>
           <a:xfrm>
-            <a:off x="11426009" y="1545177"/>
+            <a:off x="11426013" y="1215563"/>
             <a:ext cx="249633" cy="413865"/>
           </a:xfrm>
           <a:prstGeom prst="straightConnector1">
@@ -8907,7 +9343,7 @@
         </p:nvCxnSpPr>
         <p:spPr>
           <a:xfrm>
-            <a:off x="11439256" y="1797807"/>
+            <a:off x="11439260" y="1468189"/>
             <a:ext cx="182913" cy="220080"/>
           </a:xfrm>
           <a:prstGeom prst="straightConnector1">
@@ -8952,7 +9388,7 @@
         </p:nvCxnSpPr>
         <p:spPr>
           <a:xfrm>
-            <a:off x="11431827" y="2075693"/>
+            <a:off x="11431831" y="1746075"/>
             <a:ext cx="201763" cy="0"/>
           </a:xfrm>
           <a:prstGeom prst="straightConnector1">
@@ -8997,7 +9433,7 @@
         </p:nvCxnSpPr>
         <p:spPr>
           <a:xfrm flipH="1">
-            <a:off x="11456559" y="2146861"/>
+            <a:off x="11456563" y="1817247"/>
             <a:ext cx="166253" cy="219741"/>
           </a:xfrm>
           <a:prstGeom prst="straightConnector1">
@@ -9040,8 +9476,8 @@
         </p:nvSpPr>
         <p:spPr>
           <a:xfrm>
-            <a:off x="9246049" y="2213512"/>
-            <a:ext cx="803425" cy="396712"/>
+            <a:off x="8884542" y="1883894"/>
+            <a:ext cx="1167307" cy="553998"/>
           </a:xfrm>
           <a:prstGeom prst="rect">
             <a:avLst/>
@@ -9055,7 +9491,7 @@
           <a:lstStyle/>
           <a:p>
             <a:r>
-              <a:rPr lang="en-US" dirty="0">
+              <a:rPr lang="en-US" sz="3000" b="1" dirty="0">
                 <a:latin typeface="Times New Roman" panose="02020603050405020304" pitchFamily="18" charset="0"/>
                 <a:cs typeface="Times New Roman" panose="02020603050405020304" pitchFamily="18" charset="0"/>
               </a:rPr>
@@ -9078,8 +9514,8 @@
         </p:nvSpPr>
         <p:spPr>
           <a:xfrm>
-            <a:off x="11518079" y="2228366"/>
-            <a:ext cx="1255472" cy="369332"/>
+            <a:off x="11518079" y="1898748"/>
+            <a:ext cx="976549" cy="553998"/>
           </a:xfrm>
           <a:prstGeom prst="rect">
             <a:avLst/>
@@ -9093,11 +9529,11 @@
           <a:lstStyle/>
           <a:p>
             <a:r>
-              <a:rPr lang="en-US" dirty="0">
+              <a:rPr lang="en-US" sz="3000" b="1" dirty="0">
                 <a:latin typeface="Times New Roman" panose="02020603050405020304" pitchFamily="18" charset="0"/>
                 <a:cs typeface="Times New Roman" panose="02020603050405020304" pitchFamily="18" charset="0"/>
               </a:rPr>
-              <a:t>Goal object</a:t>
+              <a:t>Goal</a:t>
             </a:r>
           </a:p>
         </p:txBody>
@@ -9117,13 +9553,13 @@
           <p:nvPr>
             <p:extLst>
               <p:ext uri="{D42A27DB-BD31-4B8C-83A1-F6EECF244321}">
-                <p14:modId xmlns:p14="http://schemas.microsoft.com/office/powerpoint/2010/main" val="3491551590"/>
+                <p14:modId xmlns:p14="http://schemas.microsoft.com/office/powerpoint/2010/main" val="4047501869"/>
               </p:ext>
             </p:extLst>
           </p:nvPr>
         </p:nvGraphicFramePr>
         <p:xfrm>
-          <a:off x="981934" y="4323022"/>
+          <a:off x="1332817" y="4099738"/>
           <a:ext cx="1286765" cy="2400935"/>
         </p:xfrm>
         <a:graphic>
@@ -10425,13 +10861,13 @@
           <p:nvPr>
             <p:extLst>
               <p:ext uri="{D42A27DB-BD31-4B8C-83A1-F6EECF244321}">
-                <p14:modId xmlns:p14="http://schemas.microsoft.com/office/powerpoint/2010/main" val="3706451594"/>
+                <p14:modId xmlns:p14="http://schemas.microsoft.com/office/powerpoint/2010/main" val="1433277412"/>
               </p:ext>
             </p:extLst>
           </p:nvPr>
         </p:nvGraphicFramePr>
         <p:xfrm>
-          <a:off x="366231" y="5801302"/>
+          <a:off x="717110" y="5578018"/>
           <a:ext cx="228918" cy="480187"/>
         </p:xfrm>
         <a:graphic>
@@ -10525,13 +10961,13 @@
           <p:nvPr>
             <p:extLst>
               <p:ext uri="{D42A27DB-BD31-4B8C-83A1-F6EECF244321}">
-                <p14:modId xmlns:p14="http://schemas.microsoft.com/office/powerpoint/2010/main" val="2591314875"/>
+                <p14:modId xmlns:p14="http://schemas.microsoft.com/office/powerpoint/2010/main" val="2223890624"/>
               </p:ext>
             </p:extLst>
           </p:nvPr>
         </p:nvGraphicFramePr>
         <p:xfrm>
-          <a:off x="2591462" y="5801302"/>
+          <a:off x="2942341" y="5578018"/>
           <a:ext cx="228918" cy="480187"/>
         </p:xfrm>
         <a:graphic>
@@ -10621,7 +11057,7 @@
         </p:nvSpPr>
         <p:spPr>
           <a:xfrm rot="16424262">
-            <a:off x="2255901" y="5119124"/>
+            <a:off x="2606780" y="4895840"/>
             <a:ext cx="437712" cy="366087"/>
           </a:xfrm>
           <a:prstGeom prst="arc">
@@ -10675,8 +11111,8 @@
         </p:nvSpPr>
         <p:spPr>
           <a:xfrm>
-            <a:off x="1436005" y="6796749"/>
-            <a:ext cx="452368" cy="430887"/>
+            <a:off x="1776251" y="6541566"/>
+            <a:ext cx="548548" cy="553998"/>
           </a:xfrm>
           <a:prstGeom prst="rect">
             <a:avLst/>
@@ -10697,7 +11133,7 @@
           <a:lstStyle/>
           <a:p>
             <a:r>
-              <a:rPr lang="en-US" sz="2200" dirty="0">
+              <a:rPr lang="en-US" sz="3000" dirty="0">
                 <a:solidFill>
                   <a:schemeClr val="bg1"/>
                 </a:solidFill>
@@ -10707,7 +11143,7 @@
               <a:t>T</a:t>
             </a:r>
             <a:r>
-              <a:rPr lang="en-US" sz="2200" baseline="-25000" dirty="0">
+              <a:rPr lang="en-US" sz="3000" baseline="-25000" dirty="0">
                 <a:solidFill>
                   <a:schemeClr val="bg1"/>
                 </a:solidFill>
@@ -10733,7 +11169,7 @@
         </p:nvCxnSpPr>
         <p:spPr>
           <a:xfrm flipV="1">
-            <a:off x="654177" y="5451577"/>
+            <a:off x="1005060" y="5228289"/>
             <a:ext cx="268735" cy="474148"/>
           </a:xfrm>
           <a:prstGeom prst="straightConnector1">
@@ -10778,7 +11214,7 @@
         </p:nvCxnSpPr>
         <p:spPr>
           <a:xfrm flipV="1">
-            <a:off x="659011" y="5765212"/>
+            <a:off x="1009894" y="5541928"/>
             <a:ext cx="234849" cy="261137"/>
           </a:xfrm>
           <a:prstGeom prst="straightConnector1">
@@ -10823,7 +11259,7 @@
         </p:nvCxnSpPr>
         <p:spPr>
           <a:xfrm>
-            <a:off x="675553" y="6058426"/>
+            <a:off x="1026436" y="5835138"/>
             <a:ext cx="201763" cy="0"/>
           </a:xfrm>
           <a:prstGeom prst="straightConnector1">
@@ -10868,7 +11304,7 @@
         </p:nvCxnSpPr>
         <p:spPr>
           <a:xfrm>
-            <a:off x="671119" y="6121779"/>
+            <a:off x="1022002" y="5898495"/>
             <a:ext cx="246805" cy="206167"/>
           </a:xfrm>
           <a:prstGeom prst="straightConnector1">
@@ -10913,7 +11349,7 @@
         </p:nvCxnSpPr>
         <p:spPr>
           <a:xfrm>
-            <a:off x="2302024" y="5547962"/>
+            <a:off x="2652907" y="5324678"/>
             <a:ext cx="249633" cy="413865"/>
           </a:xfrm>
           <a:prstGeom prst="straightConnector1">
@@ -10958,7 +11394,7 @@
         </p:nvCxnSpPr>
         <p:spPr>
           <a:xfrm>
-            <a:off x="2315271" y="5800592"/>
+            <a:off x="2666154" y="5577304"/>
             <a:ext cx="182913" cy="220080"/>
           </a:xfrm>
           <a:prstGeom prst="straightConnector1">
@@ -11003,7 +11439,7 @@
         </p:nvCxnSpPr>
         <p:spPr>
           <a:xfrm>
-            <a:off x="2307842" y="6078478"/>
+            <a:off x="2658725" y="5855190"/>
             <a:ext cx="201763" cy="0"/>
           </a:xfrm>
           <a:prstGeom prst="straightConnector1">
@@ -11048,7 +11484,7 @@
         </p:nvCxnSpPr>
         <p:spPr>
           <a:xfrm flipH="1">
-            <a:off x="2332574" y="6149646"/>
+            <a:off x="2683457" y="5926362"/>
             <a:ext cx="166253" cy="219741"/>
           </a:xfrm>
           <a:prstGeom prst="straightConnector1">
@@ -11091,8 +11527,8 @@
         </p:nvSpPr>
         <p:spPr>
           <a:xfrm>
-            <a:off x="122064" y="6206359"/>
-            <a:ext cx="803425" cy="396712"/>
+            <a:off x="132699" y="5983071"/>
+            <a:ext cx="1167307" cy="553998"/>
           </a:xfrm>
           <a:prstGeom prst="rect">
             <a:avLst/>
@@ -11106,7 +11542,7 @@
           <a:lstStyle/>
           <a:p>
             <a:r>
-              <a:rPr lang="en-US" dirty="0">
+              <a:rPr lang="en-US" sz="3000" b="1" dirty="0">
                 <a:latin typeface="Times New Roman" panose="02020603050405020304" pitchFamily="18" charset="0"/>
                 <a:cs typeface="Times New Roman" panose="02020603050405020304" pitchFamily="18" charset="0"/>
               </a:rPr>
@@ -11129,8 +11565,8 @@
         </p:nvSpPr>
         <p:spPr>
           <a:xfrm>
-            <a:off x="2394094" y="6231151"/>
-            <a:ext cx="1255472" cy="369332"/>
+            <a:off x="2713074" y="5986597"/>
+            <a:ext cx="976549" cy="553998"/>
           </a:xfrm>
           <a:prstGeom prst="rect">
             <a:avLst/>
@@ -11144,11 +11580,11 @@
           <a:lstStyle/>
           <a:p>
             <a:r>
-              <a:rPr lang="en-US" dirty="0">
+              <a:rPr lang="en-US" sz="3000" b="1" dirty="0">
                 <a:latin typeface="Times New Roman" panose="02020603050405020304" pitchFamily="18" charset="0"/>
                 <a:cs typeface="Times New Roman" panose="02020603050405020304" pitchFamily="18" charset="0"/>
               </a:rPr>
-              <a:t>Goal object</a:t>
+              <a:t>Goal</a:t>
             </a:r>
           </a:p>
         </p:txBody>
@@ -11168,13 +11604,13 @@
           <p:nvPr>
             <p:extLst>
               <p:ext uri="{D42A27DB-BD31-4B8C-83A1-F6EECF244321}">
-                <p14:modId xmlns:p14="http://schemas.microsoft.com/office/powerpoint/2010/main" val="3548503721"/>
+                <p14:modId xmlns:p14="http://schemas.microsoft.com/office/powerpoint/2010/main" val="1824674807"/>
               </p:ext>
             </p:extLst>
           </p:nvPr>
         </p:nvGraphicFramePr>
         <p:xfrm>
-          <a:off x="5534056" y="4323022"/>
+          <a:off x="5534060" y="4099738"/>
           <a:ext cx="1286765" cy="2400935"/>
         </p:xfrm>
         <a:graphic>
@@ -12476,13 +12912,13 @@
           <p:nvPr>
             <p:extLst>
               <p:ext uri="{D42A27DB-BD31-4B8C-83A1-F6EECF244321}">
-                <p14:modId xmlns:p14="http://schemas.microsoft.com/office/powerpoint/2010/main" val="3656205797"/>
+                <p14:modId xmlns:p14="http://schemas.microsoft.com/office/powerpoint/2010/main" val="1940208160"/>
               </p:ext>
             </p:extLst>
           </p:nvPr>
         </p:nvGraphicFramePr>
         <p:xfrm>
-          <a:off x="4918353" y="5801302"/>
+          <a:off x="4918353" y="5578018"/>
           <a:ext cx="228918" cy="480187"/>
         </p:xfrm>
         <a:graphic>
@@ -12576,13 +13012,13 @@
           <p:nvPr>
             <p:extLst>
               <p:ext uri="{D42A27DB-BD31-4B8C-83A1-F6EECF244321}">
-                <p14:modId xmlns:p14="http://schemas.microsoft.com/office/powerpoint/2010/main" val="1154012538"/>
+                <p14:modId xmlns:p14="http://schemas.microsoft.com/office/powerpoint/2010/main" val="221641329"/>
               </p:ext>
             </p:extLst>
           </p:nvPr>
         </p:nvGraphicFramePr>
         <p:xfrm>
-          <a:off x="7143584" y="5801302"/>
+          <a:off x="7143584" y="5578018"/>
           <a:ext cx="228918" cy="480187"/>
         </p:xfrm>
         <a:graphic>
@@ -12672,7 +13108,7 @@
         </p:nvSpPr>
         <p:spPr>
           <a:xfrm rot="16424262">
-            <a:off x="6808023" y="5119124"/>
+            <a:off x="6808023" y="4895840"/>
             <a:ext cx="437712" cy="366087"/>
           </a:xfrm>
           <a:prstGeom prst="arc">
@@ -12726,8 +13162,8 @@
         </p:nvSpPr>
         <p:spPr>
           <a:xfrm>
-            <a:off x="5988127" y="6796749"/>
-            <a:ext cx="452368" cy="430887"/>
+            <a:off x="5977494" y="6541566"/>
+            <a:ext cx="548548" cy="553998"/>
           </a:xfrm>
           <a:prstGeom prst="rect">
             <a:avLst/>
@@ -12748,7 +13184,7 @@
           <a:lstStyle/>
           <a:p>
             <a:r>
-              <a:rPr lang="en-US" sz="2200" dirty="0">
+              <a:rPr lang="en-US" sz="3000" dirty="0">
                 <a:solidFill>
                   <a:schemeClr val="bg1"/>
                 </a:solidFill>
@@ -12758,7 +13194,7 @@
               <a:t>T</a:t>
             </a:r>
             <a:r>
-              <a:rPr lang="en-US" sz="2200" baseline="-25000" dirty="0">
+              <a:rPr lang="en-US" sz="3000" baseline="-25000" dirty="0">
                 <a:solidFill>
                   <a:schemeClr val="bg1"/>
                 </a:solidFill>
@@ -12784,7 +13220,7 @@
         </p:nvCxnSpPr>
         <p:spPr>
           <a:xfrm flipV="1">
-            <a:off x="5206299" y="5451577"/>
+            <a:off x="5206303" y="5228289"/>
             <a:ext cx="268735" cy="474148"/>
           </a:xfrm>
           <a:prstGeom prst="straightConnector1">
@@ -12829,7 +13265,7 @@
         </p:nvCxnSpPr>
         <p:spPr>
           <a:xfrm flipV="1">
-            <a:off x="5211133" y="5765212"/>
+            <a:off x="5211137" y="5541928"/>
             <a:ext cx="234849" cy="261137"/>
           </a:xfrm>
           <a:prstGeom prst="straightConnector1">
@@ -12874,7 +13310,7 @@
         </p:nvCxnSpPr>
         <p:spPr>
           <a:xfrm>
-            <a:off x="5227675" y="6058426"/>
+            <a:off x="5227679" y="5835138"/>
             <a:ext cx="201763" cy="0"/>
           </a:xfrm>
           <a:prstGeom prst="straightConnector1">
@@ -12919,7 +13355,7 @@
         </p:nvCxnSpPr>
         <p:spPr>
           <a:xfrm>
-            <a:off x="5223241" y="6121779"/>
+            <a:off x="5223245" y="5898495"/>
             <a:ext cx="246805" cy="206167"/>
           </a:xfrm>
           <a:prstGeom prst="straightConnector1">
@@ -12964,7 +13400,7 @@
         </p:nvCxnSpPr>
         <p:spPr>
           <a:xfrm>
-            <a:off x="6854146" y="5547962"/>
+            <a:off x="6854150" y="5324678"/>
             <a:ext cx="249633" cy="413865"/>
           </a:xfrm>
           <a:prstGeom prst="straightConnector1">
@@ -13009,7 +13445,7 @@
         </p:nvCxnSpPr>
         <p:spPr>
           <a:xfrm>
-            <a:off x="6867393" y="5800592"/>
+            <a:off x="6867397" y="5577304"/>
             <a:ext cx="182913" cy="220080"/>
           </a:xfrm>
           <a:prstGeom prst="straightConnector1">
@@ -13054,7 +13490,7 @@
         </p:nvCxnSpPr>
         <p:spPr>
           <a:xfrm>
-            <a:off x="6859964" y="6078478"/>
+            <a:off x="6859968" y="5855190"/>
             <a:ext cx="201763" cy="0"/>
           </a:xfrm>
           <a:prstGeom prst="straightConnector1">
@@ -13099,7 +13535,7 @@
         </p:nvCxnSpPr>
         <p:spPr>
           <a:xfrm flipH="1">
-            <a:off x="6884696" y="6149646"/>
+            <a:off x="6884700" y="5926362"/>
             <a:ext cx="166253" cy="219741"/>
           </a:xfrm>
           <a:prstGeom prst="straightConnector1">
@@ -13142,8 +13578,8 @@
         </p:nvSpPr>
         <p:spPr>
           <a:xfrm>
-            <a:off x="4674186" y="6216297"/>
-            <a:ext cx="803425" cy="396712"/>
+            <a:off x="4344576" y="5993009"/>
+            <a:ext cx="1167307" cy="553998"/>
           </a:xfrm>
           <a:prstGeom prst="rect">
             <a:avLst/>
@@ -13157,7 +13593,7 @@
           <a:lstStyle/>
           <a:p>
             <a:r>
-              <a:rPr lang="en-US" dirty="0">
+              <a:rPr lang="en-US" sz="3000" b="1" dirty="0">
                 <a:latin typeface="Times New Roman" panose="02020603050405020304" pitchFamily="18" charset="0"/>
                 <a:cs typeface="Times New Roman" panose="02020603050405020304" pitchFamily="18" charset="0"/>
               </a:rPr>
@@ -13180,8 +13616,8 @@
         </p:nvSpPr>
         <p:spPr>
           <a:xfrm>
-            <a:off x="6946216" y="6231151"/>
-            <a:ext cx="1255472" cy="369332"/>
+            <a:off x="6946216" y="6018496"/>
+            <a:ext cx="976549" cy="553998"/>
           </a:xfrm>
           <a:prstGeom prst="rect">
             <a:avLst/>
@@ -13195,11 +13631,11 @@
           <a:lstStyle/>
           <a:p>
             <a:r>
-              <a:rPr lang="en-US" dirty="0">
+              <a:rPr lang="en-US" sz="3000" b="1" dirty="0">
                 <a:latin typeface="Times New Roman" panose="02020603050405020304" pitchFamily="18" charset="0"/>
                 <a:cs typeface="Times New Roman" panose="02020603050405020304" pitchFamily="18" charset="0"/>
               </a:rPr>
-              <a:t>Goal object</a:t>
+              <a:t>Goal</a:t>
             </a:r>
           </a:p>
         </p:txBody>
@@ -13219,13 +13655,13 @@
           <p:nvPr>
             <p:extLst>
               <p:ext uri="{D42A27DB-BD31-4B8C-83A1-F6EECF244321}">
-                <p14:modId xmlns:p14="http://schemas.microsoft.com/office/powerpoint/2010/main" val="3425326022"/>
+                <p14:modId xmlns:p14="http://schemas.microsoft.com/office/powerpoint/2010/main" val="2857241228"/>
               </p:ext>
             </p:extLst>
           </p:nvPr>
         </p:nvGraphicFramePr>
         <p:xfrm>
-          <a:off x="10152491" y="4270046"/>
+          <a:off x="10152495" y="4046762"/>
           <a:ext cx="1286765" cy="2400935"/>
         </p:xfrm>
         <a:graphic>
@@ -14527,13 +14963,13 @@
           <p:nvPr>
             <p:extLst>
               <p:ext uri="{D42A27DB-BD31-4B8C-83A1-F6EECF244321}">
-                <p14:modId xmlns:p14="http://schemas.microsoft.com/office/powerpoint/2010/main" val="3960895521"/>
+                <p14:modId xmlns:p14="http://schemas.microsoft.com/office/powerpoint/2010/main" val="2239872417"/>
               </p:ext>
             </p:extLst>
           </p:nvPr>
         </p:nvGraphicFramePr>
         <p:xfrm>
-          <a:off x="9536788" y="5748326"/>
+          <a:off x="9536788" y="5525042"/>
           <a:ext cx="228918" cy="480187"/>
         </p:xfrm>
         <a:graphic>
@@ -14627,13 +15063,13 @@
           <p:nvPr>
             <p:extLst>
               <p:ext uri="{D42A27DB-BD31-4B8C-83A1-F6EECF244321}">
-                <p14:modId xmlns:p14="http://schemas.microsoft.com/office/powerpoint/2010/main" val="890797413"/>
+                <p14:modId xmlns:p14="http://schemas.microsoft.com/office/powerpoint/2010/main" val="640552187"/>
               </p:ext>
             </p:extLst>
           </p:nvPr>
         </p:nvGraphicFramePr>
         <p:xfrm>
-          <a:off x="11762019" y="5748326"/>
+          <a:off x="11762019" y="5525042"/>
           <a:ext cx="228918" cy="480187"/>
         </p:xfrm>
         <a:graphic>
@@ -14723,7 +15159,7 @@
         </p:nvSpPr>
         <p:spPr>
           <a:xfrm rot="16424262">
-            <a:off x="11426458" y="5066148"/>
+            <a:off x="11426458" y="4842864"/>
             <a:ext cx="437712" cy="366087"/>
           </a:xfrm>
           <a:prstGeom prst="arc">
@@ -14777,8 +15213,8 @@
         </p:nvSpPr>
         <p:spPr>
           <a:xfrm>
-            <a:off x="10606562" y="6743773"/>
-            <a:ext cx="452368" cy="430887"/>
+            <a:off x="10595929" y="6488590"/>
+            <a:ext cx="548548" cy="553998"/>
           </a:xfrm>
           <a:prstGeom prst="rect">
             <a:avLst/>
@@ -14799,7 +15235,7 @@
           <a:lstStyle/>
           <a:p>
             <a:r>
-              <a:rPr lang="en-US" sz="2200" dirty="0">
+              <a:rPr lang="en-US" sz="3000" dirty="0">
                 <a:solidFill>
                   <a:schemeClr val="bg1"/>
                 </a:solidFill>
@@ -14809,7 +15245,7 @@
               <a:t>T</a:t>
             </a:r>
             <a:r>
-              <a:rPr lang="en-US" sz="2200" baseline="-25000" dirty="0">
+              <a:rPr lang="en-US" sz="3000" baseline="-25000" dirty="0">
                 <a:solidFill>
                   <a:schemeClr val="bg1"/>
                 </a:solidFill>
@@ -14835,7 +15271,7 @@
         </p:nvCxnSpPr>
         <p:spPr>
           <a:xfrm flipV="1">
-            <a:off x="9824734" y="5398601"/>
+            <a:off x="9824738" y="5175313"/>
             <a:ext cx="268735" cy="474148"/>
           </a:xfrm>
           <a:prstGeom prst="straightConnector1">
@@ -14880,7 +15316,7 @@
         </p:nvCxnSpPr>
         <p:spPr>
           <a:xfrm flipV="1">
-            <a:off x="9829568" y="5712236"/>
+            <a:off x="9829572" y="5488952"/>
             <a:ext cx="234849" cy="261137"/>
           </a:xfrm>
           <a:prstGeom prst="straightConnector1">
@@ -14925,7 +15361,7 @@
         </p:nvCxnSpPr>
         <p:spPr>
           <a:xfrm>
-            <a:off x="9846110" y="6005450"/>
+            <a:off x="9846114" y="5782162"/>
             <a:ext cx="201763" cy="0"/>
           </a:xfrm>
           <a:prstGeom prst="straightConnector1">
@@ -14970,7 +15406,7 @@
         </p:nvCxnSpPr>
         <p:spPr>
           <a:xfrm>
-            <a:off x="9841676" y="6068803"/>
+            <a:off x="9841680" y="5845519"/>
             <a:ext cx="246805" cy="206167"/>
           </a:xfrm>
           <a:prstGeom prst="straightConnector1">
@@ -15015,7 +15451,7 @@
         </p:nvCxnSpPr>
         <p:spPr>
           <a:xfrm>
-            <a:off x="11472581" y="5494986"/>
+            <a:off x="11472585" y="5271702"/>
             <a:ext cx="249633" cy="413865"/>
           </a:xfrm>
           <a:prstGeom prst="straightConnector1">
@@ -15060,7 +15496,7 @@
         </p:nvCxnSpPr>
         <p:spPr>
           <a:xfrm>
-            <a:off x="11485828" y="5747616"/>
+            <a:off x="11485832" y="5524328"/>
             <a:ext cx="182913" cy="220080"/>
           </a:xfrm>
           <a:prstGeom prst="straightConnector1">
@@ -15105,7 +15541,7 @@
         </p:nvCxnSpPr>
         <p:spPr>
           <a:xfrm>
-            <a:off x="11478399" y="6025502"/>
+            <a:off x="11478403" y="5802214"/>
             <a:ext cx="201763" cy="0"/>
           </a:xfrm>
           <a:prstGeom prst="straightConnector1">
@@ -15150,7 +15586,7 @@
         </p:nvCxnSpPr>
         <p:spPr>
           <a:xfrm flipH="1">
-            <a:off x="11503131" y="6096670"/>
+            <a:off x="11503135" y="5873386"/>
             <a:ext cx="166253" cy="219741"/>
           </a:xfrm>
           <a:prstGeom prst="straightConnector1">
@@ -15193,8 +15629,8 @@
         </p:nvSpPr>
         <p:spPr>
           <a:xfrm>
-            <a:off x="9292621" y="6163321"/>
-            <a:ext cx="803425" cy="396712"/>
+            <a:off x="8931114" y="5940033"/>
+            <a:ext cx="1167307" cy="553998"/>
           </a:xfrm>
           <a:prstGeom prst="rect">
             <a:avLst/>
@@ -15208,7 +15644,7 @@
           <a:lstStyle/>
           <a:p>
             <a:r>
-              <a:rPr lang="en-US" dirty="0">
+              <a:rPr lang="en-US" sz="3000" b="1" dirty="0">
                 <a:latin typeface="Times New Roman" panose="02020603050405020304" pitchFamily="18" charset="0"/>
                 <a:cs typeface="Times New Roman" panose="02020603050405020304" pitchFamily="18" charset="0"/>
               </a:rPr>
@@ -15231,8 +15667,8 @@
         </p:nvSpPr>
         <p:spPr>
           <a:xfrm>
-            <a:off x="11564651" y="6178175"/>
-            <a:ext cx="1255472" cy="369332"/>
+            <a:off x="11564651" y="5954887"/>
+            <a:ext cx="976549" cy="553998"/>
           </a:xfrm>
           <a:prstGeom prst="rect">
             <a:avLst/>
@@ -15246,11 +15682,11 @@
           <a:lstStyle/>
           <a:p>
             <a:r>
-              <a:rPr lang="en-US" dirty="0">
+              <a:rPr lang="en-US" sz="3000" b="1" dirty="0">
                 <a:latin typeface="Times New Roman" panose="02020603050405020304" pitchFamily="18" charset="0"/>
                 <a:cs typeface="Times New Roman" panose="02020603050405020304" pitchFamily="18" charset="0"/>
               </a:rPr>
-              <a:t>Goal object</a:t>
+              <a:t>Goal</a:t>
             </a:r>
           </a:p>
         </p:txBody>
@@ -15270,13 +15706,13 @@
           <p:nvPr>
             <p:extLst>
               <p:ext uri="{D42A27DB-BD31-4B8C-83A1-F6EECF244321}">
-                <p14:modId xmlns:p14="http://schemas.microsoft.com/office/powerpoint/2010/main" val="797605359"/>
+                <p14:modId xmlns:p14="http://schemas.microsoft.com/office/powerpoint/2010/main" val="1272410901"/>
               </p:ext>
             </p:extLst>
           </p:nvPr>
         </p:nvGraphicFramePr>
         <p:xfrm>
-          <a:off x="981934" y="7865194"/>
+          <a:off x="1332817" y="7907730"/>
           <a:ext cx="1286765" cy="2400935"/>
         </p:xfrm>
         <a:graphic>
@@ -16578,13 +17014,13 @@
           <p:nvPr>
             <p:extLst>
               <p:ext uri="{D42A27DB-BD31-4B8C-83A1-F6EECF244321}">
-                <p14:modId xmlns:p14="http://schemas.microsoft.com/office/powerpoint/2010/main" val="620562714"/>
+                <p14:modId xmlns:p14="http://schemas.microsoft.com/office/powerpoint/2010/main" val="703823971"/>
               </p:ext>
             </p:extLst>
           </p:nvPr>
         </p:nvGraphicFramePr>
         <p:xfrm>
-          <a:off x="366231" y="9343474"/>
+          <a:off x="717110" y="9386010"/>
           <a:ext cx="228918" cy="480187"/>
         </p:xfrm>
         <a:graphic>
@@ -16678,13 +17114,13 @@
           <p:nvPr>
             <p:extLst>
               <p:ext uri="{D42A27DB-BD31-4B8C-83A1-F6EECF244321}">
-                <p14:modId xmlns:p14="http://schemas.microsoft.com/office/powerpoint/2010/main" val="427424100"/>
+                <p14:modId xmlns:p14="http://schemas.microsoft.com/office/powerpoint/2010/main" val="1023323294"/>
               </p:ext>
             </p:extLst>
           </p:nvPr>
         </p:nvGraphicFramePr>
         <p:xfrm>
-          <a:off x="2591462" y="9343474"/>
+          <a:off x="2942341" y="9386010"/>
           <a:ext cx="228918" cy="480187"/>
         </p:xfrm>
         <a:graphic>
@@ -16774,7 +17210,7 @@
         </p:nvSpPr>
         <p:spPr>
           <a:xfrm rot="16424262">
-            <a:off x="2255901" y="8661296"/>
+            <a:off x="2606780" y="8703832"/>
             <a:ext cx="437712" cy="366087"/>
           </a:xfrm>
           <a:prstGeom prst="arc">
@@ -16828,8 +17264,8 @@
         </p:nvSpPr>
         <p:spPr>
           <a:xfrm>
-            <a:off x="1436005" y="10354161"/>
-            <a:ext cx="452368" cy="430887"/>
+            <a:off x="1786884" y="10396697"/>
+            <a:ext cx="548548" cy="553998"/>
           </a:xfrm>
           <a:prstGeom prst="rect">
             <a:avLst/>
@@ -16850,7 +17286,7 @@
           <a:lstStyle/>
           <a:p>
             <a:r>
-              <a:rPr lang="en-US" sz="2200" dirty="0">
+              <a:rPr lang="en-US" sz="3000" dirty="0">
                 <a:solidFill>
                   <a:schemeClr val="bg1"/>
                 </a:solidFill>
@@ -16860,7 +17296,7 @@
               <a:t>T</a:t>
             </a:r>
             <a:r>
-              <a:rPr lang="en-US" sz="2200" baseline="-25000" dirty="0">
+              <a:rPr lang="en-US" sz="3000" baseline="-25000" dirty="0">
                 <a:solidFill>
                   <a:schemeClr val="bg1"/>
                 </a:solidFill>
@@ -16886,7 +17322,7 @@
         </p:nvCxnSpPr>
         <p:spPr>
           <a:xfrm flipV="1">
-            <a:off x="654177" y="8993749"/>
+            <a:off x="1005060" y="9036281"/>
             <a:ext cx="268735" cy="474148"/>
           </a:xfrm>
           <a:prstGeom prst="straightConnector1">
@@ -16931,7 +17367,7 @@
         </p:nvCxnSpPr>
         <p:spPr>
           <a:xfrm flipV="1">
-            <a:off x="659011" y="9307384"/>
+            <a:off x="1009894" y="9349920"/>
             <a:ext cx="234849" cy="261137"/>
           </a:xfrm>
           <a:prstGeom prst="straightConnector1">
@@ -16976,7 +17412,7 @@
         </p:nvCxnSpPr>
         <p:spPr>
           <a:xfrm>
-            <a:off x="675553" y="9600598"/>
+            <a:off x="1026436" y="9643130"/>
             <a:ext cx="201763" cy="0"/>
           </a:xfrm>
           <a:prstGeom prst="straightConnector1">
@@ -17021,7 +17457,7 @@
         </p:nvCxnSpPr>
         <p:spPr>
           <a:xfrm>
-            <a:off x="671119" y="9663951"/>
+            <a:off x="1022002" y="9706487"/>
             <a:ext cx="246805" cy="206167"/>
           </a:xfrm>
           <a:prstGeom prst="straightConnector1">
@@ -17066,7 +17502,7 @@
         </p:nvCxnSpPr>
         <p:spPr>
           <a:xfrm>
-            <a:off x="2302024" y="9090134"/>
+            <a:off x="2652907" y="9132670"/>
             <a:ext cx="249633" cy="413865"/>
           </a:xfrm>
           <a:prstGeom prst="straightConnector1">
@@ -17111,7 +17547,7 @@
         </p:nvCxnSpPr>
         <p:spPr>
           <a:xfrm>
-            <a:off x="2315271" y="9342764"/>
+            <a:off x="2666154" y="9385296"/>
             <a:ext cx="182913" cy="220080"/>
           </a:xfrm>
           <a:prstGeom prst="straightConnector1">
@@ -17156,7 +17592,7 @@
         </p:nvCxnSpPr>
         <p:spPr>
           <a:xfrm>
-            <a:off x="2307842" y="9620650"/>
+            <a:off x="2658725" y="9663182"/>
             <a:ext cx="201763" cy="0"/>
           </a:xfrm>
           <a:prstGeom prst="straightConnector1">
@@ -17201,7 +17637,7 @@
         </p:nvCxnSpPr>
         <p:spPr>
           <a:xfrm flipH="1">
-            <a:off x="2332574" y="9691818"/>
+            <a:off x="2683457" y="9734354"/>
             <a:ext cx="166253" cy="219741"/>
           </a:xfrm>
           <a:prstGeom prst="straightConnector1">
@@ -17244,8 +17680,8 @@
         </p:nvSpPr>
         <p:spPr>
           <a:xfrm>
-            <a:off x="122064" y="9733291"/>
-            <a:ext cx="803425" cy="396712"/>
+            <a:off x="132699" y="9775823"/>
+            <a:ext cx="1167307" cy="553998"/>
           </a:xfrm>
           <a:prstGeom prst="rect">
             <a:avLst/>
@@ -17259,7 +17695,7 @@
           <a:lstStyle/>
           <a:p>
             <a:r>
-              <a:rPr lang="en-US" dirty="0">
+              <a:rPr lang="en-US" sz="3000" b="1" dirty="0">
                 <a:latin typeface="Times New Roman" panose="02020603050405020304" pitchFamily="18" charset="0"/>
                 <a:cs typeface="Times New Roman" panose="02020603050405020304" pitchFamily="18" charset="0"/>
               </a:rPr>
@@ -17282,8 +17718,8 @@
         </p:nvSpPr>
         <p:spPr>
           <a:xfrm>
-            <a:off x="2394094" y="9773323"/>
-            <a:ext cx="676788" cy="396712"/>
+            <a:off x="2713078" y="9794589"/>
+            <a:ext cx="976549" cy="553998"/>
           </a:xfrm>
           <a:prstGeom prst="rect">
             <a:avLst/>
@@ -17297,7 +17733,7 @@
           <a:lstStyle/>
           <a:p>
             <a:r>
-              <a:rPr lang="en-US" dirty="0">
+              <a:rPr lang="en-US" sz="3000" b="1" dirty="0">
                 <a:latin typeface="Times New Roman" panose="02020603050405020304" pitchFamily="18" charset="0"/>
                 <a:cs typeface="Times New Roman" panose="02020603050405020304" pitchFamily="18" charset="0"/>
               </a:rPr>
@@ -17321,13 +17757,13 @@
           <p:nvPr>
             <p:extLst>
               <p:ext uri="{D42A27DB-BD31-4B8C-83A1-F6EECF244321}">
-                <p14:modId xmlns:p14="http://schemas.microsoft.com/office/powerpoint/2010/main" val="3476881121"/>
+                <p14:modId xmlns:p14="http://schemas.microsoft.com/office/powerpoint/2010/main" val="1251536273"/>
               </p:ext>
             </p:extLst>
           </p:nvPr>
         </p:nvGraphicFramePr>
         <p:xfrm>
-          <a:off x="5534056" y="7865194"/>
+          <a:off x="5534060" y="7907730"/>
           <a:ext cx="1286765" cy="2400935"/>
         </p:xfrm>
         <a:graphic>
@@ -18620,13 +19056,13 @@
           <p:nvPr>
             <p:extLst>
               <p:ext uri="{D42A27DB-BD31-4B8C-83A1-F6EECF244321}">
-                <p14:modId xmlns:p14="http://schemas.microsoft.com/office/powerpoint/2010/main" val="2391411302"/>
+                <p14:modId xmlns:p14="http://schemas.microsoft.com/office/powerpoint/2010/main" val="1332046519"/>
               </p:ext>
             </p:extLst>
           </p:nvPr>
         </p:nvGraphicFramePr>
         <p:xfrm>
-          <a:off x="4918353" y="9343474"/>
+          <a:off x="4918353" y="9386010"/>
           <a:ext cx="228918" cy="480187"/>
         </p:xfrm>
         <a:graphic>
@@ -18720,13 +19156,13 @@
           <p:nvPr>
             <p:extLst>
               <p:ext uri="{D42A27DB-BD31-4B8C-83A1-F6EECF244321}">
-                <p14:modId xmlns:p14="http://schemas.microsoft.com/office/powerpoint/2010/main" val="4048518158"/>
+                <p14:modId xmlns:p14="http://schemas.microsoft.com/office/powerpoint/2010/main" val="1259768752"/>
               </p:ext>
             </p:extLst>
           </p:nvPr>
         </p:nvGraphicFramePr>
         <p:xfrm>
-          <a:off x="7143584" y="9343474"/>
+          <a:off x="7143584" y="9386010"/>
           <a:ext cx="228918" cy="480187"/>
         </p:xfrm>
         <a:graphic>
@@ -18816,7 +19252,7 @@
         </p:nvSpPr>
         <p:spPr>
           <a:xfrm rot="16424262">
-            <a:off x="6808023" y="8661296"/>
+            <a:off x="6808023" y="8703832"/>
             <a:ext cx="437712" cy="366087"/>
           </a:xfrm>
           <a:prstGeom prst="arc">
@@ -18870,8 +19306,8 @@
         </p:nvSpPr>
         <p:spPr>
           <a:xfrm>
-            <a:off x="5988127" y="10354161"/>
-            <a:ext cx="452368" cy="430887"/>
+            <a:off x="5988127" y="10396697"/>
+            <a:ext cx="548548" cy="553998"/>
           </a:xfrm>
           <a:prstGeom prst="rect">
             <a:avLst/>
@@ -18892,7 +19328,7 @@
           <a:lstStyle/>
           <a:p>
             <a:r>
-              <a:rPr lang="en-US" sz="2200" dirty="0">
+              <a:rPr lang="en-US" sz="3000" dirty="0">
                 <a:solidFill>
                   <a:schemeClr val="bg1"/>
                 </a:solidFill>
@@ -18902,7 +19338,7 @@
               <a:t>T</a:t>
             </a:r>
             <a:r>
-              <a:rPr lang="en-US" sz="2200" baseline="-25000" dirty="0">
+              <a:rPr lang="en-US" sz="3000" baseline="-25000" dirty="0">
                 <a:solidFill>
                   <a:schemeClr val="bg1"/>
                 </a:solidFill>
@@ -18928,7 +19364,7 @@
         </p:nvCxnSpPr>
         <p:spPr>
           <a:xfrm flipV="1">
-            <a:off x="5206299" y="8993749"/>
+            <a:off x="5206303" y="9036281"/>
             <a:ext cx="268735" cy="474148"/>
           </a:xfrm>
           <a:prstGeom prst="straightConnector1">
@@ -18973,7 +19409,7 @@
         </p:nvCxnSpPr>
         <p:spPr>
           <a:xfrm flipV="1">
-            <a:off x="5211133" y="9307384"/>
+            <a:off x="5211137" y="9349920"/>
             <a:ext cx="234849" cy="261137"/>
           </a:xfrm>
           <a:prstGeom prst="straightConnector1">
@@ -19018,7 +19454,7 @@
         </p:nvCxnSpPr>
         <p:spPr>
           <a:xfrm>
-            <a:off x="5227675" y="9600598"/>
+            <a:off x="5227679" y="9643130"/>
             <a:ext cx="201763" cy="0"/>
           </a:xfrm>
           <a:prstGeom prst="straightConnector1">
@@ -19063,7 +19499,7 @@
         </p:nvCxnSpPr>
         <p:spPr>
           <a:xfrm>
-            <a:off x="5223241" y="9663951"/>
+            <a:off x="5223245" y="9706487"/>
             <a:ext cx="246805" cy="206167"/>
           </a:xfrm>
           <a:prstGeom prst="straightConnector1">
@@ -19108,7 +19544,7 @@
         </p:nvCxnSpPr>
         <p:spPr>
           <a:xfrm>
-            <a:off x="6854146" y="9090134"/>
+            <a:off x="6854150" y="9132670"/>
             <a:ext cx="249633" cy="413865"/>
           </a:xfrm>
           <a:prstGeom prst="straightConnector1">
@@ -19153,7 +19589,7 @@
         </p:nvCxnSpPr>
         <p:spPr>
           <a:xfrm>
-            <a:off x="6867393" y="9342764"/>
+            <a:off x="6867397" y="9385296"/>
             <a:ext cx="182913" cy="220080"/>
           </a:xfrm>
           <a:prstGeom prst="straightConnector1">
@@ -19198,7 +19634,7 @@
         </p:nvCxnSpPr>
         <p:spPr>
           <a:xfrm>
-            <a:off x="6859964" y="9620650"/>
+            <a:off x="6859968" y="9663182"/>
             <a:ext cx="201763" cy="0"/>
           </a:xfrm>
           <a:prstGeom prst="straightConnector1">
@@ -19243,7 +19679,7 @@
         </p:nvCxnSpPr>
         <p:spPr>
           <a:xfrm flipH="1">
-            <a:off x="6884696" y="9691818"/>
+            <a:off x="6884700" y="9734354"/>
             <a:ext cx="166253" cy="219741"/>
           </a:xfrm>
           <a:prstGeom prst="straightConnector1">
@@ -19286,8 +19722,8 @@
         </p:nvSpPr>
         <p:spPr>
           <a:xfrm>
-            <a:off x="4674186" y="9758469"/>
-            <a:ext cx="803425" cy="396712"/>
+            <a:off x="4344576" y="9801001"/>
+            <a:ext cx="1167307" cy="553998"/>
           </a:xfrm>
           <a:prstGeom prst="rect">
             <a:avLst/>
@@ -19301,7 +19737,7 @@
           <a:lstStyle/>
           <a:p>
             <a:r>
-              <a:rPr lang="en-US" dirty="0">
+              <a:rPr lang="en-US" sz="3000" b="1" dirty="0">
                 <a:latin typeface="Times New Roman" panose="02020603050405020304" pitchFamily="18" charset="0"/>
                 <a:cs typeface="Times New Roman" panose="02020603050405020304" pitchFamily="18" charset="0"/>
               </a:rPr>
@@ -19324,8 +19760,8 @@
         </p:nvSpPr>
         <p:spPr>
           <a:xfrm>
-            <a:off x="6946216" y="9773323"/>
-            <a:ext cx="676788" cy="396712"/>
+            <a:off x="6946220" y="9826488"/>
+            <a:ext cx="976549" cy="553998"/>
           </a:xfrm>
           <a:prstGeom prst="rect">
             <a:avLst/>
@@ -19339,7 +19775,7 @@
           <a:lstStyle/>
           <a:p>
             <a:r>
-              <a:rPr lang="en-US" dirty="0">
+              <a:rPr lang="en-US" sz="3000" b="1" dirty="0">
                 <a:latin typeface="Times New Roman" panose="02020603050405020304" pitchFamily="18" charset="0"/>
                 <a:cs typeface="Times New Roman" panose="02020603050405020304" pitchFamily="18" charset="0"/>
               </a:rPr>
@@ -19363,13 +19799,13 @@
           <p:nvPr>
             <p:extLst>
               <p:ext uri="{D42A27DB-BD31-4B8C-83A1-F6EECF244321}">
-                <p14:modId xmlns:p14="http://schemas.microsoft.com/office/powerpoint/2010/main" val="1631673945"/>
+                <p14:modId xmlns:p14="http://schemas.microsoft.com/office/powerpoint/2010/main" val="626823257"/>
               </p:ext>
             </p:extLst>
           </p:nvPr>
         </p:nvGraphicFramePr>
         <p:xfrm>
-          <a:off x="10152491" y="7812218"/>
+          <a:off x="10152495" y="7854754"/>
           <a:ext cx="1286765" cy="2400935"/>
         </p:xfrm>
         <a:graphic>
@@ -20659,13 +21095,13 @@
           <p:nvPr>
             <p:extLst>
               <p:ext uri="{D42A27DB-BD31-4B8C-83A1-F6EECF244321}">
-                <p14:modId xmlns:p14="http://schemas.microsoft.com/office/powerpoint/2010/main" val="276483871"/>
+                <p14:modId xmlns:p14="http://schemas.microsoft.com/office/powerpoint/2010/main" val="2468467617"/>
               </p:ext>
             </p:extLst>
           </p:nvPr>
         </p:nvGraphicFramePr>
         <p:xfrm>
-          <a:off x="9536788" y="9290498"/>
+          <a:off x="9536788" y="9333034"/>
           <a:ext cx="228918" cy="480187"/>
         </p:xfrm>
         <a:graphic>
@@ -20759,13 +21195,13 @@
           <p:nvPr>
             <p:extLst>
               <p:ext uri="{D42A27DB-BD31-4B8C-83A1-F6EECF244321}">
-                <p14:modId xmlns:p14="http://schemas.microsoft.com/office/powerpoint/2010/main" val="1695182361"/>
+                <p14:modId xmlns:p14="http://schemas.microsoft.com/office/powerpoint/2010/main" val="898043871"/>
               </p:ext>
             </p:extLst>
           </p:nvPr>
         </p:nvGraphicFramePr>
         <p:xfrm>
-          <a:off x="11762019" y="9290498"/>
+          <a:off x="11762019" y="9333034"/>
           <a:ext cx="228918" cy="480187"/>
         </p:xfrm>
         <a:graphic>
@@ -20858,7 +21294,7 @@
         </p:nvSpPr>
         <p:spPr>
           <a:xfrm rot="16424262">
-            <a:off x="11426458" y="8608320"/>
+            <a:off x="11426458" y="8650856"/>
             <a:ext cx="437712" cy="366087"/>
           </a:xfrm>
           <a:prstGeom prst="arc">
@@ -20912,8 +21348,8 @@
         </p:nvSpPr>
         <p:spPr>
           <a:xfrm>
-            <a:off x="10606562" y="10301185"/>
-            <a:ext cx="452368" cy="430887"/>
+            <a:off x="10606562" y="10343721"/>
+            <a:ext cx="548548" cy="553998"/>
           </a:xfrm>
           <a:prstGeom prst="rect">
             <a:avLst/>
@@ -20934,7 +21370,7 @@
           <a:lstStyle/>
           <a:p>
             <a:r>
-              <a:rPr lang="en-US" sz="2200" dirty="0">
+              <a:rPr lang="en-US" sz="3000" dirty="0">
                 <a:solidFill>
                   <a:schemeClr val="bg1"/>
                 </a:solidFill>
@@ -20944,7 +21380,7 @@
               <a:t>T</a:t>
             </a:r>
             <a:r>
-              <a:rPr lang="en-US" sz="2200" baseline="-25000" dirty="0">
+              <a:rPr lang="en-US" sz="3000" baseline="-25000" dirty="0">
                 <a:solidFill>
                   <a:schemeClr val="bg1"/>
                 </a:solidFill>
@@ -20970,7 +21406,7 @@
         </p:nvCxnSpPr>
         <p:spPr>
           <a:xfrm flipV="1">
-            <a:off x="9824734" y="8940773"/>
+            <a:off x="9824738" y="8983305"/>
             <a:ext cx="268735" cy="474148"/>
           </a:xfrm>
           <a:prstGeom prst="straightConnector1">
@@ -21015,7 +21451,7 @@
         </p:nvCxnSpPr>
         <p:spPr>
           <a:xfrm flipV="1">
-            <a:off x="9829568" y="9254408"/>
+            <a:off x="9829572" y="9296944"/>
             <a:ext cx="234849" cy="261137"/>
           </a:xfrm>
           <a:prstGeom prst="straightConnector1">
@@ -21060,7 +21496,7 @@
         </p:nvCxnSpPr>
         <p:spPr>
           <a:xfrm>
-            <a:off x="9846110" y="9547622"/>
+            <a:off x="9846114" y="9590154"/>
             <a:ext cx="201763" cy="0"/>
           </a:xfrm>
           <a:prstGeom prst="straightConnector1">
@@ -21105,7 +21541,7 @@
         </p:nvCxnSpPr>
         <p:spPr>
           <a:xfrm>
-            <a:off x="9841676" y="9610975"/>
+            <a:off x="9841680" y="9653511"/>
             <a:ext cx="246805" cy="206167"/>
           </a:xfrm>
           <a:prstGeom prst="straightConnector1">
@@ -21150,7 +21586,7 @@
         </p:nvCxnSpPr>
         <p:spPr>
           <a:xfrm>
-            <a:off x="11472581" y="9037158"/>
+            <a:off x="11472585" y="9079694"/>
             <a:ext cx="249633" cy="413865"/>
           </a:xfrm>
           <a:prstGeom prst="straightConnector1">
@@ -21195,7 +21631,7 @@
         </p:nvCxnSpPr>
         <p:spPr>
           <a:xfrm>
-            <a:off x="11485828" y="9289788"/>
+            <a:off x="11485832" y="9332320"/>
             <a:ext cx="182913" cy="220080"/>
           </a:xfrm>
           <a:prstGeom prst="straightConnector1">
@@ -21240,7 +21676,7 @@
         </p:nvCxnSpPr>
         <p:spPr>
           <a:xfrm>
-            <a:off x="11478399" y="9567674"/>
+            <a:off x="11478403" y="9610206"/>
             <a:ext cx="201763" cy="0"/>
           </a:xfrm>
           <a:prstGeom prst="straightConnector1">
@@ -21285,7 +21721,7 @@
         </p:nvCxnSpPr>
         <p:spPr>
           <a:xfrm flipH="1">
-            <a:off x="11503131" y="9638842"/>
+            <a:off x="11503135" y="9681378"/>
             <a:ext cx="166253" cy="219741"/>
           </a:xfrm>
           <a:prstGeom prst="straightConnector1">
@@ -21328,8 +21764,8 @@
         </p:nvSpPr>
         <p:spPr>
           <a:xfrm>
-            <a:off x="9292621" y="9705493"/>
-            <a:ext cx="803425" cy="396712"/>
+            <a:off x="8931114" y="9748025"/>
+            <a:ext cx="1167307" cy="553998"/>
           </a:xfrm>
           <a:prstGeom prst="rect">
             <a:avLst/>
@@ -21343,7 +21779,7 @@
           <a:lstStyle/>
           <a:p>
             <a:r>
-              <a:rPr lang="en-US" dirty="0">
+              <a:rPr lang="en-US" sz="3000" b="1" dirty="0">
                 <a:latin typeface="Times New Roman" panose="02020603050405020304" pitchFamily="18" charset="0"/>
                 <a:cs typeface="Times New Roman" panose="02020603050405020304" pitchFamily="18" charset="0"/>
               </a:rPr>
@@ -21366,8 +21802,8 @@
         </p:nvSpPr>
         <p:spPr>
           <a:xfrm>
-            <a:off x="11564651" y="9720347"/>
-            <a:ext cx="676788" cy="396712"/>
+            <a:off x="11564655" y="9762879"/>
+            <a:ext cx="976549" cy="553998"/>
           </a:xfrm>
           <a:prstGeom prst="rect">
             <a:avLst/>
@@ -21381,7 +21817,7 @@
           <a:lstStyle/>
           <a:p>
             <a:r>
-              <a:rPr lang="en-US" dirty="0">
+              <a:rPr lang="en-US" sz="3000" b="1" dirty="0">
                 <a:latin typeface="Times New Roman" panose="02020603050405020304" pitchFamily="18" charset="0"/>
                 <a:cs typeface="Times New Roman" panose="02020603050405020304" pitchFamily="18" charset="0"/>
               </a:rPr>
@@ -21404,7 +21840,7 @@
         </p:nvCxnSpPr>
         <p:spPr>
           <a:xfrm>
-            <a:off x="1295261" y="3330610"/>
+            <a:off x="1295261" y="3213644"/>
             <a:ext cx="9170504" cy="0"/>
           </a:xfrm>
           <a:prstGeom prst="straightConnector1">
@@ -21432,44 +21868,6 @@
           </a:fontRef>
         </p:style>
       </p:cxnSp>
-      <p:sp>
-        <p:nvSpPr>
-          <p:cNvPr id="9" name="TextBox 8">
-            <a:extLst>
-              <a:ext uri="{FF2B5EF4-FFF2-40B4-BE49-F238E27FC236}">
-                <a16:creationId xmlns:a16="http://schemas.microsoft.com/office/drawing/2014/main" id="{D1CADF10-A73F-8595-7A82-5F83E61F384F}"/>
-              </a:ext>
-            </a:extLst>
-          </p:cNvPr>
-          <p:cNvSpPr txBox="1"/>
-          <p:nvPr/>
-        </p:nvSpPr>
-        <p:spPr>
-          <a:xfrm>
-            <a:off x="5428655" y="3856809"/>
-            <a:ext cx="744371" cy="396712"/>
-          </a:xfrm>
-          <a:prstGeom prst="rect">
-            <a:avLst/>
-          </a:prstGeom>
-          <a:noFill/>
-        </p:spPr>
-        <p:txBody>
-          <a:bodyPr wrap="none" rtlCol="0">
-            <a:spAutoFit/>
-          </a:bodyPr>
-          <a:lstStyle/>
-          <a:p>
-            <a:r>
-              <a:rPr lang="en-US" b="1" dirty="0">
-                <a:latin typeface="Times New Roman" panose="02020603050405020304" pitchFamily="18" charset="0"/>
-                <a:cs typeface="Times New Roman" panose="02020603050405020304" pitchFamily="18" charset="0"/>
-              </a:rPr>
-              <a:t>Time</a:t>
-            </a:r>
-          </a:p>
-        </p:txBody>
-      </p:sp>
       <p:cxnSp>
         <p:nvCxnSpPr>
           <p:cNvPr id="10" name="Straight Arrow Connector 9">
@@ -21484,7 +21882,7 @@
         </p:nvCxnSpPr>
         <p:spPr>
           <a:xfrm>
-            <a:off x="1306226" y="7368065"/>
+            <a:off x="1306226" y="7176673"/>
             <a:ext cx="9170504" cy="0"/>
           </a:xfrm>
           <a:prstGeom prst="straightConnector1">
@@ -21526,8 +21924,8 @@
         </p:nvSpPr>
         <p:spPr>
           <a:xfrm>
-            <a:off x="5439620" y="7330384"/>
-            <a:ext cx="2049215" cy="396712"/>
+            <a:off x="4748499" y="7075194"/>
+            <a:ext cx="3010248" cy="553998"/>
           </a:xfrm>
           <a:prstGeom prst="rect">
             <a:avLst/>
@@ -21541,7 +21939,7 @@
           <a:lstStyle/>
           <a:p>
             <a:r>
-              <a:rPr lang="en-US" b="1" dirty="0">
+              <a:rPr lang="en-US" sz="3000" b="1" dirty="0">
                 <a:latin typeface="Times New Roman" panose="02020603050405020304" pitchFamily="18" charset="0"/>
                 <a:cs typeface="Times New Roman" panose="02020603050405020304" pitchFamily="18" charset="0"/>
               </a:rPr>
@@ -21564,7 +21962,7 @@
         </p:nvCxnSpPr>
         <p:spPr>
           <a:xfrm>
-            <a:off x="1306226" y="10918985"/>
+            <a:off x="1306226" y="11078478"/>
             <a:ext cx="9170504" cy="0"/>
           </a:xfrm>
           <a:prstGeom prst="straightConnector1">
@@ -21594,44 +21992,6 @@
       </p:cxnSp>
       <p:sp>
         <p:nvSpPr>
-          <p:cNvPr id="13" name="TextBox 12">
-            <a:extLst>
-              <a:ext uri="{FF2B5EF4-FFF2-40B4-BE49-F238E27FC236}">
-                <a16:creationId xmlns:a16="http://schemas.microsoft.com/office/drawing/2014/main" id="{8D8444BB-550E-4921-EAD8-A3E29760BADE}"/>
-              </a:ext>
-            </a:extLst>
-          </p:cNvPr>
-          <p:cNvSpPr txBox="1"/>
-          <p:nvPr/>
-        </p:nvSpPr>
-        <p:spPr>
-          <a:xfrm>
-            <a:off x="5439620" y="10881304"/>
-            <a:ext cx="2049215" cy="396712"/>
-          </a:xfrm>
-          <a:prstGeom prst="rect">
-            <a:avLst/>
-          </a:prstGeom>
-          <a:noFill/>
-        </p:spPr>
-        <p:txBody>
-          <a:bodyPr wrap="none" rtlCol="0">
-            <a:spAutoFit/>
-          </a:bodyPr>
-          <a:lstStyle/>
-          <a:p>
-            <a:r>
-              <a:rPr lang="en-US" b="1" dirty="0">
-                <a:latin typeface="Times New Roman" panose="02020603050405020304" pitchFamily="18" charset="0"/>
-                <a:cs typeface="Times New Roman" panose="02020603050405020304" pitchFamily="18" charset="0"/>
-              </a:rPr>
-              <a:t>Time (continued)</a:t>
-            </a:r>
-          </a:p>
-        </p:txBody>
-      </p:sp>
-      <p:sp>
-        <p:nvSpPr>
           <p:cNvPr id="22" name="Freeform: Shape 21">
             <a:extLst>
               <a:ext uri="{FF2B5EF4-FFF2-40B4-BE49-F238E27FC236}">
@@ -21644,7 +22004,7 @@
         </p:nvSpPr>
         <p:spPr>
           <a:xfrm>
-            <a:off x="10165080" y="2072640"/>
+            <a:off x="10165080" y="1743022"/>
             <a:ext cx="305908" cy="434368"/>
           </a:xfrm>
           <a:custGeom>
@@ -21736,7 +22096,7 @@
         </p:nvSpPr>
         <p:spPr>
           <a:xfrm>
-            <a:off x="1082811" y="5451577"/>
+            <a:off x="1433694" y="5228289"/>
             <a:ext cx="286663" cy="1047096"/>
           </a:xfrm>
           <a:custGeom>
@@ -21828,7 +22188,7 @@
         </p:nvSpPr>
         <p:spPr>
           <a:xfrm>
-            <a:off x="5577840" y="5514488"/>
+            <a:off x="5577840" y="5291204"/>
             <a:ext cx="606346" cy="1058407"/>
           </a:xfrm>
           <a:custGeom>
@@ -21930,7 +22290,7 @@
         </p:nvSpPr>
         <p:spPr>
           <a:xfrm>
-            <a:off x="10189526" y="5373483"/>
+            <a:off x="10189530" y="5150199"/>
             <a:ext cx="911279" cy="1117547"/>
           </a:xfrm>
           <a:custGeom>
@@ -22032,7 +22392,7 @@
         </p:nvSpPr>
         <p:spPr>
           <a:xfrm>
-            <a:off x="1097280" y="9058950"/>
+            <a:off x="1448159" y="9101486"/>
             <a:ext cx="794976" cy="1039525"/>
           </a:xfrm>
           <a:custGeom>
@@ -22144,7 +22504,7 @@
         </p:nvSpPr>
         <p:spPr>
           <a:xfrm>
-            <a:off x="5608320" y="8953244"/>
+            <a:off x="5608320" y="8995776"/>
             <a:ext cx="818204" cy="1164130"/>
           </a:xfrm>
           <a:custGeom>
@@ -22264,7 +22624,7 @@
         </p:nvSpPr>
         <p:spPr>
           <a:xfrm>
-            <a:off x="10226040" y="8966678"/>
+            <a:off x="10226040" y="9009210"/>
             <a:ext cx="1127760" cy="1149230"/>
           </a:xfrm>
           <a:custGeom>
@@ -22386,7 +22746,7 @@
         </p:nvSpPr>
         <p:spPr>
           <a:xfrm>
-            <a:off x="5577840" y="2575560"/>
+            <a:off x="5577840" y="2245942"/>
             <a:ext cx="320040" cy="0"/>
           </a:xfrm>
           <a:custGeom>
@@ -22466,7 +22826,7 @@
         </p:nvSpPr>
         <p:spPr>
           <a:xfrm>
-            <a:off x="975360" y="2575560"/>
+            <a:off x="1326239" y="2245942"/>
             <a:ext cx="152400" cy="0"/>
           </a:xfrm>
           <a:custGeom>
@@ -22537,6 +22897,82 @@
           <a:p>
             <a:pPr algn="ctr"/>
             <a:endParaRPr lang="en-US"/>
+          </a:p>
+        </p:txBody>
+      </p:sp>
+      <p:sp>
+        <p:nvSpPr>
+          <p:cNvPr id="366" name="TextBox 365">
+            <a:extLst>
+              <a:ext uri="{FF2B5EF4-FFF2-40B4-BE49-F238E27FC236}">
+                <a16:creationId xmlns:a16="http://schemas.microsoft.com/office/drawing/2014/main" id="{73D0D22C-5A62-119D-1DE7-6ECFD9ECD071}"/>
+              </a:ext>
+            </a:extLst>
+          </p:cNvPr>
+          <p:cNvSpPr txBox="1"/>
+          <p:nvPr/>
+        </p:nvSpPr>
+        <p:spPr>
+          <a:xfrm>
+            <a:off x="4741408" y="3144677"/>
+            <a:ext cx="3010248" cy="553998"/>
+          </a:xfrm>
+          <a:prstGeom prst="rect">
+            <a:avLst/>
+          </a:prstGeom>
+          <a:noFill/>
+        </p:spPr>
+        <p:txBody>
+          <a:bodyPr wrap="none" rtlCol="0">
+            <a:spAutoFit/>
+          </a:bodyPr>
+          <a:lstStyle/>
+          <a:p>
+            <a:r>
+              <a:rPr lang="en-US" sz="3000" b="1" dirty="0">
+                <a:latin typeface="Times New Roman" panose="02020603050405020304" pitchFamily="18" charset="0"/>
+                <a:cs typeface="Times New Roman" panose="02020603050405020304" pitchFamily="18" charset="0"/>
+              </a:rPr>
+              <a:t>Time (continued)</a:t>
+            </a:r>
+          </a:p>
+        </p:txBody>
+      </p:sp>
+      <p:sp>
+        <p:nvSpPr>
+          <p:cNvPr id="367" name="TextBox 366">
+            <a:extLst>
+              <a:ext uri="{FF2B5EF4-FFF2-40B4-BE49-F238E27FC236}">
+                <a16:creationId xmlns:a16="http://schemas.microsoft.com/office/drawing/2014/main" id="{6B0E527E-D134-2E6D-2B41-879321CDCA69}"/>
+              </a:ext>
+            </a:extLst>
+          </p:cNvPr>
+          <p:cNvSpPr txBox="1"/>
+          <p:nvPr/>
+        </p:nvSpPr>
+        <p:spPr>
+          <a:xfrm>
+            <a:off x="4752040" y="10991537"/>
+            <a:ext cx="3010248" cy="553998"/>
+          </a:xfrm>
+          <a:prstGeom prst="rect">
+            <a:avLst/>
+          </a:prstGeom>
+          <a:noFill/>
+        </p:spPr>
+        <p:txBody>
+          <a:bodyPr wrap="none" rtlCol="0">
+            <a:spAutoFit/>
+          </a:bodyPr>
+          <a:lstStyle/>
+          <a:p>
+            <a:r>
+              <a:rPr lang="en-US" sz="3000" b="1" dirty="0">
+                <a:latin typeface="Times New Roman" panose="02020603050405020304" pitchFamily="18" charset="0"/>
+                <a:cs typeface="Times New Roman" panose="02020603050405020304" pitchFamily="18" charset="0"/>
+              </a:rPr>
+              <a:t>Time (continued)</a:t>
+            </a:r>
           </a:p>
         </p:txBody>
       </p:sp>
@@ -22866,4 +23302,319 @@
     </a:ext>
   </a:extLst>
 </a:theme>
+</file>
+
+<file path=ppt/theme/theme2.xml><?xml version="1.0" encoding="utf-8"?>
+<a:theme xmlns:a="http://schemas.openxmlformats.org/drawingml/2006/main" name="Office Theme">
+  <a:themeElements>
+    <a:clrScheme name="Office">
+      <a:dk1>
+        <a:sysClr val="windowText" lastClr="000000"/>
+      </a:dk1>
+      <a:lt1>
+        <a:sysClr val="window" lastClr="FFFFFF"/>
+      </a:lt1>
+      <a:dk2>
+        <a:srgbClr val="0E2841"/>
+      </a:dk2>
+      <a:lt2>
+        <a:srgbClr val="E8E8E8"/>
+      </a:lt2>
+      <a:accent1>
+        <a:srgbClr val="156082"/>
+      </a:accent1>
+      <a:accent2>
+        <a:srgbClr val="E97132"/>
+      </a:accent2>
+      <a:accent3>
+        <a:srgbClr val="196B24"/>
+      </a:accent3>
+      <a:accent4>
+        <a:srgbClr val="0F9ED5"/>
+      </a:accent4>
+      <a:accent5>
+        <a:srgbClr val="A02B93"/>
+      </a:accent5>
+      <a:accent6>
+        <a:srgbClr val="4EA72E"/>
+      </a:accent6>
+      <a:hlink>
+        <a:srgbClr val="467886"/>
+      </a:hlink>
+      <a:folHlink>
+        <a:srgbClr val="96607D"/>
+      </a:folHlink>
+    </a:clrScheme>
+    <a:fontScheme name="Office">
+      <a:majorFont>
+        <a:latin typeface="Aptos Display" panose="02110004020202020204"/>
+        <a:ea typeface=""/>
+        <a:cs typeface=""/>
+        <a:font script="Jpan" typeface="游ゴシック Light"/>
+        <a:font script="Hang" typeface="맑은 고딕"/>
+        <a:font script="Hans" typeface="等线 Light"/>
+        <a:font script="Hant" typeface="新細明體"/>
+        <a:font script="Arab" typeface="Times New Roman"/>
+        <a:font script="Hebr" typeface="Times New Roman"/>
+        <a:font script="Thai" typeface="Angsana New"/>
+        <a:font script="Ethi" typeface="Nyala"/>
+        <a:font script="Beng" typeface="Vrinda"/>
+        <a:font script="Gujr" typeface="Shruti"/>
+        <a:font script="Khmr" typeface="MoolBoran"/>
+        <a:font script="Knda" typeface="Tunga"/>
+        <a:font script="Guru" typeface="Raavi"/>
+        <a:font script="Cans" typeface="Euphemia"/>
+        <a:font script="Cher" typeface="Plantagenet Cherokee"/>
+        <a:font script="Yiii" typeface="Microsoft Yi Baiti"/>
+        <a:font script="Tibt" typeface="Microsoft Himalaya"/>
+        <a:font script="Thaa" typeface="MV Boli"/>
+        <a:font script="Deva" typeface="Mangal"/>
+        <a:font script="Telu" typeface="Gautami"/>
+        <a:font script="Taml" typeface="Latha"/>
+        <a:font script="Syrc" typeface="Estrangelo Edessa"/>
+        <a:font script="Orya" typeface="Kalinga"/>
+        <a:font script="Mlym" typeface="Kartika"/>
+        <a:font script="Laoo" typeface="DokChampa"/>
+        <a:font script="Sinh" typeface="Iskoola Pota"/>
+        <a:font script="Mong" typeface="Mongolian Baiti"/>
+        <a:font script="Viet" typeface="Times New Roman"/>
+        <a:font script="Uigh" typeface="Microsoft Uighur"/>
+        <a:font script="Geor" typeface="Sylfaen"/>
+        <a:font script="Armn" typeface="Arial"/>
+        <a:font script="Bugi" typeface="Leelawadee UI"/>
+        <a:font script="Bopo" typeface="Microsoft JhengHei"/>
+        <a:font script="Java" typeface="Javanese Text"/>
+        <a:font script="Lisu" typeface="Segoe UI"/>
+        <a:font script="Mymr" typeface="Myanmar Text"/>
+        <a:font script="Nkoo" typeface="Ebrima"/>
+        <a:font script="Olck" typeface="Nirmala UI"/>
+        <a:font script="Osma" typeface="Ebrima"/>
+        <a:font script="Phag" typeface="Phagspa"/>
+        <a:font script="Syrn" typeface="Estrangelo Edessa"/>
+        <a:font script="Syrj" typeface="Estrangelo Edessa"/>
+        <a:font script="Syre" typeface="Estrangelo Edessa"/>
+        <a:font script="Sora" typeface="Nirmala UI"/>
+        <a:font script="Tale" typeface="Microsoft Tai Le"/>
+        <a:font script="Talu" typeface="Microsoft New Tai Lue"/>
+        <a:font script="Tfng" typeface="Ebrima"/>
+      </a:majorFont>
+      <a:minorFont>
+        <a:latin typeface="Aptos" panose="02110004020202020204"/>
+        <a:ea typeface=""/>
+        <a:cs typeface=""/>
+        <a:font script="Jpan" typeface="游ゴシック"/>
+        <a:font script="Hang" typeface="맑은 고딕"/>
+        <a:font script="Hans" typeface="等线"/>
+        <a:font script="Hant" typeface="新細明體"/>
+        <a:font script="Arab" typeface="Arial"/>
+        <a:font script="Hebr" typeface="Arial"/>
+        <a:font script="Thai" typeface="Cordia New"/>
+        <a:font script="Ethi" typeface="Nyala"/>
+        <a:font script="Beng" typeface="Vrinda"/>
+        <a:font script="Gujr" typeface="Shruti"/>
+        <a:font script="Khmr" typeface="DaunPenh"/>
+        <a:font script="Knda" typeface="Tunga"/>
+        <a:font script="Guru" typeface="Raavi"/>
+        <a:font script="Cans" typeface="Euphemia"/>
+        <a:font script="Cher" typeface="Plantagenet Cherokee"/>
+        <a:font script="Yiii" typeface="Microsoft Yi Baiti"/>
+        <a:font script="Tibt" typeface="Microsoft Himalaya"/>
+        <a:font script="Thaa" typeface="MV Boli"/>
+        <a:font script="Deva" typeface="Mangal"/>
+        <a:font script="Telu" typeface="Gautami"/>
+        <a:font script="Taml" typeface="Latha"/>
+        <a:font script="Syrc" typeface="Estrangelo Edessa"/>
+        <a:font script="Orya" typeface="Kalinga"/>
+        <a:font script="Mlym" typeface="Kartika"/>
+        <a:font script="Laoo" typeface="DokChampa"/>
+        <a:font script="Sinh" typeface="Iskoola Pota"/>
+        <a:font script="Mong" typeface="Mongolian Baiti"/>
+        <a:font script="Viet" typeface="Arial"/>
+        <a:font script="Uigh" typeface="Microsoft Uighur"/>
+        <a:font script="Geor" typeface="Sylfaen"/>
+        <a:font script="Armn" typeface="Arial"/>
+        <a:font script="Bugi" typeface="Leelawadee UI"/>
+        <a:font script="Bopo" typeface="Microsoft JhengHei"/>
+        <a:font script="Java" typeface="Javanese Text"/>
+        <a:font script="Lisu" typeface="Segoe UI"/>
+        <a:font script="Mymr" typeface="Myanmar Text"/>
+        <a:font script="Nkoo" typeface="Ebrima"/>
+        <a:font script="Olck" typeface="Nirmala UI"/>
+        <a:font script="Osma" typeface="Ebrima"/>
+        <a:font script="Phag" typeface="Phagspa"/>
+        <a:font script="Syrn" typeface="Estrangelo Edessa"/>
+        <a:font script="Syrj" typeface="Estrangelo Edessa"/>
+        <a:font script="Syre" typeface="Estrangelo Edessa"/>
+        <a:font script="Sora" typeface="Nirmala UI"/>
+        <a:font script="Tale" typeface="Microsoft Tai Le"/>
+        <a:font script="Talu" typeface="Microsoft New Tai Lue"/>
+        <a:font script="Tfng" typeface="Ebrima"/>
+      </a:minorFont>
+    </a:fontScheme>
+    <a:fmtScheme name="Office">
+      <a:fillStyleLst>
+        <a:solidFill>
+          <a:schemeClr val="phClr"/>
+        </a:solidFill>
+        <a:gradFill rotWithShape="1">
+          <a:gsLst>
+            <a:gs pos="0">
+              <a:schemeClr val="phClr">
+                <a:lumMod val="110000"/>
+                <a:satMod val="105000"/>
+                <a:tint val="67000"/>
+              </a:schemeClr>
+            </a:gs>
+            <a:gs pos="50000">
+              <a:schemeClr val="phClr">
+                <a:lumMod val="105000"/>
+                <a:satMod val="103000"/>
+                <a:tint val="73000"/>
+              </a:schemeClr>
+            </a:gs>
+            <a:gs pos="100000">
+              <a:schemeClr val="phClr">
+                <a:lumMod val="105000"/>
+                <a:satMod val="109000"/>
+                <a:tint val="81000"/>
+              </a:schemeClr>
+            </a:gs>
+          </a:gsLst>
+          <a:lin ang="5400000" scaled="0"/>
+        </a:gradFill>
+        <a:gradFill rotWithShape="1">
+          <a:gsLst>
+            <a:gs pos="0">
+              <a:schemeClr val="phClr">
+                <a:satMod val="103000"/>
+                <a:lumMod val="102000"/>
+                <a:tint val="94000"/>
+              </a:schemeClr>
+            </a:gs>
+            <a:gs pos="50000">
+              <a:schemeClr val="phClr">
+                <a:satMod val="110000"/>
+                <a:lumMod val="100000"/>
+                <a:shade val="100000"/>
+              </a:schemeClr>
+            </a:gs>
+            <a:gs pos="100000">
+              <a:schemeClr val="phClr">
+                <a:lumMod val="99000"/>
+                <a:satMod val="120000"/>
+                <a:shade val="78000"/>
+              </a:schemeClr>
+            </a:gs>
+          </a:gsLst>
+          <a:lin ang="5400000" scaled="0"/>
+        </a:gradFill>
+      </a:fillStyleLst>
+      <a:lnStyleLst>
+        <a:ln w="12700" cap="flat" cmpd="sng" algn="ctr">
+          <a:solidFill>
+            <a:schemeClr val="phClr"/>
+          </a:solidFill>
+          <a:prstDash val="solid"/>
+          <a:miter lim="800000"/>
+        </a:ln>
+        <a:ln w="19050" cap="flat" cmpd="sng" algn="ctr">
+          <a:solidFill>
+            <a:schemeClr val="phClr"/>
+          </a:solidFill>
+          <a:prstDash val="solid"/>
+          <a:miter lim="800000"/>
+        </a:ln>
+        <a:ln w="25400" cap="flat" cmpd="sng" algn="ctr">
+          <a:solidFill>
+            <a:schemeClr val="phClr"/>
+          </a:solidFill>
+          <a:prstDash val="solid"/>
+          <a:miter lim="800000"/>
+        </a:ln>
+      </a:lnStyleLst>
+      <a:effectStyleLst>
+        <a:effectStyle>
+          <a:effectLst/>
+        </a:effectStyle>
+        <a:effectStyle>
+          <a:effectLst/>
+        </a:effectStyle>
+        <a:effectStyle>
+          <a:effectLst>
+            <a:outerShdw blurRad="57150" dist="19050" dir="5400000" algn="ctr" rotWithShape="0">
+              <a:srgbClr val="000000">
+                <a:alpha val="63000"/>
+              </a:srgbClr>
+            </a:outerShdw>
+          </a:effectLst>
+        </a:effectStyle>
+      </a:effectStyleLst>
+      <a:bgFillStyleLst>
+        <a:solidFill>
+          <a:schemeClr val="phClr"/>
+        </a:solidFill>
+        <a:solidFill>
+          <a:schemeClr val="phClr">
+            <a:tint val="95000"/>
+            <a:satMod val="170000"/>
+          </a:schemeClr>
+        </a:solidFill>
+        <a:gradFill rotWithShape="1">
+          <a:gsLst>
+            <a:gs pos="0">
+              <a:schemeClr val="phClr">
+                <a:tint val="93000"/>
+                <a:satMod val="150000"/>
+                <a:shade val="98000"/>
+                <a:lumMod val="102000"/>
+              </a:schemeClr>
+            </a:gs>
+            <a:gs pos="50000">
+              <a:schemeClr val="phClr">
+                <a:tint val="98000"/>
+                <a:satMod val="130000"/>
+                <a:shade val="90000"/>
+                <a:lumMod val="103000"/>
+              </a:schemeClr>
+            </a:gs>
+            <a:gs pos="100000">
+              <a:schemeClr val="phClr">
+                <a:shade val="63000"/>
+                <a:satMod val="120000"/>
+              </a:schemeClr>
+            </a:gs>
+          </a:gsLst>
+          <a:lin ang="5400000" scaled="0"/>
+        </a:gradFill>
+      </a:bgFillStyleLst>
+    </a:fmtScheme>
+  </a:themeElements>
+  <a:objectDefaults>
+    <a:lnDef>
+      <a:spPr/>
+      <a:bodyPr/>
+      <a:lstStyle/>
+      <a:style>
+        <a:lnRef idx="2">
+          <a:schemeClr val="accent1"/>
+        </a:lnRef>
+        <a:fillRef idx="0">
+          <a:schemeClr val="accent1"/>
+        </a:fillRef>
+        <a:effectRef idx="1">
+          <a:schemeClr val="accent1"/>
+        </a:effectRef>
+        <a:fontRef idx="minor">
+          <a:schemeClr val="tx1"/>
+        </a:fontRef>
+      </a:style>
+    </a:lnDef>
+  </a:objectDefaults>
+  <a:extraClrSchemeLst/>
+  <a:extLst>
+    <a:ext uri="{05A4C25C-085E-4340-85A3-A5531E510DB2}">
+      <thm15:themeFamily xmlns:thm15="http://schemas.microsoft.com/office/thememl/2012/main" name="Office Theme" id="{2E142A2C-CD16-42D6-873A-C26D2A0506FA}" vid="{1BDDFF52-6CD6-40A5-AB3C-68EB2F1E4D0A}"/>
+    </a:ext>
+  </a:extLst>
+</a:theme>
 </file>